--- a/public/downloads/US-114051-L4-Post-Meeting-Follow-Up.pptx
+++ b/public/downloads/US-114051-L4-Post-Meeting-Follow-Up.pptx
@@ -11,9 +11,14 @@
     <p:sldId id="259" r:id="rId5"/>
     <p:sldId id="260" r:id="rId6"/>
     <p:sldId id="261" r:id="rId7"/>
+    <p:sldId id="262" r:id="rId8"/>
+    <p:sldId id="263" r:id="rId9"/>
+    <p:sldId id="264" r:id="rId10"/>
+    <p:sldId id="265" r:id="rId11"/>
+    <p:sldId id="266" r:id="rId12"/>
   </p:sldIdLst>
   <p:notesMasterIdLst>
-    <p:notesMasterId r:id="rId8"/>
+    <p:notesMasterId r:id="rId13"/>
   </p:notesMasterIdLst>
   <p:sldSz cx="12188952" cy="6858000"/>
   <p:notesSz cx="6858000" cy="12188952"/>
@@ -549,6 +554,182 @@
 </p:notes>
 </file>
 
+<file path=ppt/notesSlides/notesSlide10.xml><?xml version="1.0" encoding="utf-8"?>
+<p:notes xmlns:a="http://schemas.openxmlformats.org/drawingml/2006/main" xmlns:r="http://schemas.openxmlformats.org/officeDocument/2006/relationships" xmlns:p="http://schemas.openxmlformats.org/presentationml/2006/main">
+  <p:cSld>
+    <p:spTree>
+      <p:nvGrpSpPr>
+        <p:cNvPr id="1" name=""/>
+        <p:cNvGrpSpPr/>
+        <p:nvPr/>
+      </p:nvGrpSpPr>
+      <p:grpSpPr>
+        <a:xfrm>
+          <a:off x="0" y="0"/>
+          <a:ext cx="0" cy="0"/>
+          <a:chOff x="0" y="0"/>
+          <a:chExt cx="0" cy="0"/>
+        </a:xfrm>
+      </p:grpSpPr>
+      <p:sp>
+        <p:nvSpPr>
+          <p:cNvPr id="2" name="Slide Image Placeholder 1"/>
+          <p:cNvSpPr>
+            <a:spLocks noGrp="1" noRot="1" noChangeAspect="1"/>
+          </p:cNvSpPr>
+          <p:nvPr>
+            <p:ph type="sldImg"/>
+          </p:nvPr>
+        </p:nvSpPr>
+        <p:spPr/>
+      </p:sp>
+      <p:sp>
+        <p:nvSpPr>
+          <p:cNvPr id="3" name="Notes Placeholder 2"/>
+          <p:cNvSpPr>
+            <a:spLocks noGrp="1"/>
+          </p:cNvSpPr>
+          <p:nvPr>
+            <p:ph type="body" idx="1"/>
+          </p:nvPr>
+        </p:nvSpPr>
+        <p:spPr/>
+        <p:txBody>
+          <a:bodyPr/>
+          <a:lstStyle/>
+          <a:p>
+            <a:r>
+              <a:rPr lang="en-US" dirty="0"/>
+              <a:t/>
+            </a:r>
+            <a:endParaRPr lang="en-US" dirty="0"/>
+          </a:p>
+        </p:txBody>
+      </p:sp>
+      <p:sp>
+        <p:nvSpPr>
+          <p:cNvPr id="4" name="Slide Number Placeholder 3"/>
+          <p:cNvSpPr>
+            <a:spLocks noGrp="1"/>
+          </p:cNvSpPr>
+          <p:nvPr>
+            <p:ph type="sldNum" sz="quarter" idx="10"/>
+          </p:nvPr>
+        </p:nvSpPr>
+        <p:spPr/>
+        <p:txBody>
+          <a:bodyPr/>
+          <a:lstStyle/>
+          <a:p>
+            <a:fld id="{F7021451-1387-4CA6-816F-3879F97B5CBC}" type="slidenum">
+              <a:rPr lang="en-US"/>
+              <a:t>10</a:t>
+            </a:fld>
+            <a:endParaRPr lang="en-US"/>
+          </a:p>
+        </p:txBody>
+      </p:sp>
+    </p:spTree>
+    <p:extLst>
+      <p:ext uri="{BB962C8B-B14F-4D97-AF65-F5344CB8AC3E}">
+        <p14:creationId xmlns:p14="http://schemas.microsoft.com/office/powerpoint/2010/main" val="1024086991"/>
+      </p:ext>
+    </p:extLst>
+  </p:cSld>
+  <p:clrMapOvr>
+    <a:masterClrMapping/>
+  </p:clrMapOvr>
+</p:notes>
+</file>
+
+<file path=ppt/notesSlides/notesSlide11.xml><?xml version="1.0" encoding="utf-8"?>
+<p:notes xmlns:a="http://schemas.openxmlformats.org/drawingml/2006/main" xmlns:r="http://schemas.openxmlformats.org/officeDocument/2006/relationships" xmlns:p="http://schemas.openxmlformats.org/presentationml/2006/main">
+  <p:cSld>
+    <p:spTree>
+      <p:nvGrpSpPr>
+        <p:cNvPr id="1" name=""/>
+        <p:cNvGrpSpPr/>
+        <p:nvPr/>
+      </p:nvGrpSpPr>
+      <p:grpSpPr>
+        <a:xfrm>
+          <a:off x="0" y="0"/>
+          <a:ext cx="0" cy="0"/>
+          <a:chOff x="0" y="0"/>
+          <a:chExt cx="0" cy="0"/>
+        </a:xfrm>
+      </p:grpSpPr>
+      <p:sp>
+        <p:nvSpPr>
+          <p:cNvPr id="2" name="Slide Image Placeholder 1"/>
+          <p:cNvSpPr>
+            <a:spLocks noGrp="1" noRot="1" noChangeAspect="1"/>
+          </p:cNvSpPr>
+          <p:nvPr>
+            <p:ph type="sldImg"/>
+          </p:nvPr>
+        </p:nvSpPr>
+        <p:spPr/>
+      </p:sp>
+      <p:sp>
+        <p:nvSpPr>
+          <p:cNvPr id="3" name="Notes Placeholder 2"/>
+          <p:cNvSpPr>
+            <a:spLocks noGrp="1"/>
+          </p:cNvSpPr>
+          <p:nvPr>
+            <p:ph type="body" idx="1"/>
+          </p:nvPr>
+        </p:nvSpPr>
+        <p:spPr/>
+        <p:txBody>
+          <a:bodyPr/>
+          <a:lstStyle/>
+          <a:p>
+            <a:r>
+              <a:rPr lang="en-US" dirty="0"/>
+              <a:t/>
+            </a:r>
+            <a:endParaRPr lang="en-US" dirty="0"/>
+          </a:p>
+        </p:txBody>
+      </p:sp>
+      <p:sp>
+        <p:nvSpPr>
+          <p:cNvPr id="4" name="Slide Number Placeholder 3"/>
+          <p:cNvSpPr>
+            <a:spLocks noGrp="1"/>
+          </p:cNvSpPr>
+          <p:nvPr>
+            <p:ph type="sldNum" sz="quarter" idx="10"/>
+          </p:nvPr>
+        </p:nvSpPr>
+        <p:spPr/>
+        <p:txBody>
+          <a:bodyPr/>
+          <a:lstStyle/>
+          <a:p>
+            <a:fld id="{F7021451-1387-4CA6-816F-3879F97B5CBC}" type="slidenum">
+              <a:rPr lang="en-US"/>
+              <a:t>11</a:t>
+            </a:fld>
+            <a:endParaRPr lang="en-US"/>
+          </a:p>
+        </p:txBody>
+      </p:sp>
+    </p:spTree>
+    <p:extLst>
+      <p:ext uri="{BB962C8B-B14F-4D97-AF65-F5344CB8AC3E}">
+        <p14:creationId xmlns:p14="http://schemas.microsoft.com/office/powerpoint/2010/main" val="1024086991"/>
+      </p:ext>
+    </p:extLst>
+  </p:cSld>
+  <p:clrMapOvr>
+    <a:masterClrMapping/>
+  </p:clrMapOvr>
+</p:notes>
+</file>
+
 <file path=ppt/notesSlides/notesSlide2.xml><?xml version="1.0" encoding="utf-8"?>
 <p:notes xmlns:a="http://schemas.openxmlformats.org/drawingml/2006/main" xmlns:r="http://schemas.openxmlformats.org/officeDocument/2006/relationships" xmlns:p="http://schemas.openxmlformats.org/presentationml/2006/main">
   <p:cSld>
@@ -971,6 +1152,270 @@
             <a:fld id="{F7021451-1387-4CA6-816F-3879F97B5CBC}" type="slidenum">
               <a:rPr lang="en-US"/>
               <a:t>6</a:t>
+            </a:fld>
+            <a:endParaRPr lang="en-US"/>
+          </a:p>
+        </p:txBody>
+      </p:sp>
+    </p:spTree>
+    <p:extLst>
+      <p:ext uri="{BB962C8B-B14F-4D97-AF65-F5344CB8AC3E}">
+        <p14:creationId xmlns:p14="http://schemas.microsoft.com/office/powerpoint/2010/main" val="1024086991"/>
+      </p:ext>
+    </p:extLst>
+  </p:cSld>
+  <p:clrMapOvr>
+    <a:masterClrMapping/>
+  </p:clrMapOvr>
+</p:notes>
+</file>
+
+<file path=ppt/notesSlides/notesSlide7.xml><?xml version="1.0" encoding="utf-8"?>
+<p:notes xmlns:a="http://schemas.openxmlformats.org/drawingml/2006/main" xmlns:r="http://schemas.openxmlformats.org/officeDocument/2006/relationships" xmlns:p="http://schemas.openxmlformats.org/presentationml/2006/main">
+  <p:cSld>
+    <p:spTree>
+      <p:nvGrpSpPr>
+        <p:cNvPr id="1" name=""/>
+        <p:cNvGrpSpPr/>
+        <p:nvPr/>
+      </p:nvGrpSpPr>
+      <p:grpSpPr>
+        <a:xfrm>
+          <a:off x="0" y="0"/>
+          <a:ext cx="0" cy="0"/>
+          <a:chOff x="0" y="0"/>
+          <a:chExt cx="0" cy="0"/>
+        </a:xfrm>
+      </p:grpSpPr>
+      <p:sp>
+        <p:nvSpPr>
+          <p:cNvPr id="2" name="Slide Image Placeholder 1"/>
+          <p:cNvSpPr>
+            <a:spLocks noGrp="1" noRot="1" noChangeAspect="1"/>
+          </p:cNvSpPr>
+          <p:nvPr>
+            <p:ph type="sldImg"/>
+          </p:nvPr>
+        </p:nvSpPr>
+        <p:spPr/>
+      </p:sp>
+      <p:sp>
+        <p:nvSpPr>
+          <p:cNvPr id="3" name="Notes Placeholder 2"/>
+          <p:cNvSpPr>
+            <a:spLocks noGrp="1"/>
+          </p:cNvSpPr>
+          <p:nvPr>
+            <p:ph type="body" idx="1"/>
+          </p:nvPr>
+        </p:nvSpPr>
+        <p:spPr/>
+        <p:txBody>
+          <a:bodyPr/>
+          <a:lstStyle/>
+          <a:p>
+            <a:r>
+              <a:rPr lang="en-US" dirty="0"/>
+              <a:t/>
+            </a:r>
+            <a:endParaRPr lang="en-US" dirty="0"/>
+          </a:p>
+        </p:txBody>
+      </p:sp>
+      <p:sp>
+        <p:nvSpPr>
+          <p:cNvPr id="4" name="Slide Number Placeholder 3"/>
+          <p:cNvSpPr>
+            <a:spLocks noGrp="1"/>
+          </p:cNvSpPr>
+          <p:nvPr>
+            <p:ph type="sldNum" sz="quarter" idx="10"/>
+          </p:nvPr>
+        </p:nvSpPr>
+        <p:spPr/>
+        <p:txBody>
+          <a:bodyPr/>
+          <a:lstStyle/>
+          <a:p>
+            <a:fld id="{F7021451-1387-4CA6-816F-3879F97B5CBC}" type="slidenum">
+              <a:rPr lang="en-US"/>
+              <a:t>7</a:t>
+            </a:fld>
+            <a:endParaRPr lang="en-US"/>
+          </a:p>
+        </p:txBody>
+      </p:sp>
+    </p:spTree>
+    <p:extLst>
+      <p:ext uri="{BB962C8B-B14F-4D97-AF65-F5344CB8AC3E}">
+        <p14:creationId xmlns:p14="http://schemas.microsoft.com/office/powerpoint/2010/main" val="1024086991"/>
+      </p:ext>
+    </p:extLst>
+  </p:cSld>
+  <p:clrMapOvr>
+    <a:masterClrMapping/>
+  </p:clrMapOvr>
+</p:notes>
+</file>
+
+<file path=ppt/notesSlides/notesSlide8.xml><?xml version="1.0" encoding="utf-8"?>
+<p:notes xmlns:a="http://schemas.openxmlformats.org/drawingml/2006/main" xmlns:r="http://schemas.openxmlformats.org/officeDocument/2006/relationships" xmlns:p="http://schemas.openxmlformats.org/presentationml/2006/main">
+  <p:cSld>
+    <p:spTree>
+      <p:nvGrpSpPr>
+        <p:cNvPr id="1" name=""/>
+        <p:cNvGrpSpPr/>
+        <p:nvPr/>
+      </p:nvGrpSpPr>
+      <p:grpSpPr>
+        <a:xfrm>
+          <a:off x="0" y="0"/>
+          <a:ext cx="0" cy="0"/>
+          <a:chOff x="0" y="0"/>
+          <a:chExt cx="0" cy="0"/>
+        </a:xfrm>
+      </p:grpSpPr>
+      <p:sp>
+        <p:nvSpPr>
+          <p:cNvPr id="2" name="Slide Image Placeholder 1"/>
+          <p:cNvSpPr>
+            <a:spLocks noGrp="1" noRot="1" noChangeAspect="1"/>
+          </p:cNvSpPr>
+          <p:nvPr>
+            <p:ph type="sldImg"/>
+          </p:nvPr>
+        </p:nvSpPr>
+        <p:spPr/>
+      </p:sp>
+      <p:sp>
+        <p:nvSpPr>
+          <p:cNvPr id="3" name="Notes Placeholder 2"/>
+          <p:cNvSpPr>
+            <a:spLocks noGrp="1"/>
+          </p:cNvSpPr>
+          <p:nvPr>
+            <p:ph type="body" idx="1"/>
+          </p:nvPr>
+        </p:nvSpPr>
+        <p:spPr/>
+        <p:txBody>
+          <a:bodyPr/>
+          <a:lstStyle/>
+          <a:p>
+            <a:r>
+              <a:rPr lang="en-US" dirty="0"/>
+              <a:t/>
+            </a:r>
+            <a:endParaRPr lang="en-US" dirty="0"/>
+          </a:p>
+        </p:txBody>
+      </p:sp>
+      <p:sp>
+        <p:nvSpPr>
+          <p:cNvPr id="4" name="Slide Number Placeholder 3"/>
+          <p:cNvSpPr>
+            <a:spLocks noGrp="1"/>
+          </p:cNvSpPr>
+          <p:nvPr>
+            <p:ph type="sldNum" sz="quarter" idx="10"/>
+          </p:nvPr>
+        </p:nvSpPr>
+        <p:spPr/>
+        <p:txBody>
+          <a:bodyPr/>
+          <a:lstStyle/>
+          <a:p>
+            <a:fld id="{F7021451-1387-4CA6-816F-3879F97B5CBC}" type="slidenum">
+              <a:rPr lang="en-US"/>
+              <a:t>8</a:t>
+            </a:fld>
+            <a:endParaRPr lang="en-US"/>
+          </a:p>
+        </p:txBody>
+      </p:sp>
+    </p:spTree>
+    <p:extLst>
+      <p:ext uri="{BB962C8B-B14F-4D97-AF65-F5344CB8AC3E}">
+        <p14:creationId xmlns:p14="http://schemas.microsoft.com/office/powerpoint/2010/main" val="1024086991"/>
+      </p:ext>
+    </p:extLst>
+  </p:cSld>
+  <p:clrMapOvr>
+    <a:masterClrMapping/>
+  </p:clrMapOvr>
+</p:notes>
+</file>
+
+<file path=ppt/notesSlides/notesSlide9.xml><?xml version="1.0" encoding="utf-8"?>
+<p:notes xmlns:a="http://schemas.openxmlformats.org/drawingml/2006/main" xmlns:r="http://schemas.openxmlformats.org/officeDocument/2006/relationships" xmlns:p="http://schemas.openxmlformats.org/presentationml/2006/main">
+  <p:cSld>
+    <p:spTree>
+      <p:nvGrpSpPr>
+        <p:cNvPr id="1" name=""/>
+        <p:cNvGrpSpPr/>
+        <p:nvPr/>
+      </p:nvGrpSpPr>
+      <p:grpSpPr>
+        <a:xfrm>
+          <a:off x="0" y="0"/>
+          <a:ext cx="0" cy="0"/>
+          <a:chOff x="0" y="0"/>
+          <a:chExt cx="0" cy="0"/>
+        </a:xfrm>
+      </p:grpSpPr>
+      <p:sp>
+        <p:nvSpPr>
+          <p:cNvPr id="2" name="Slide Image Placeholder 1"/>
+          <p:cNvSpPr>
+            <a:spLocks noGrp="1" noRot="1" noChangeAspect="1"/>
+          </p:cNvSpPr>
+          <p:nvPr>
+            <p:ph type="sldImg"/>
+          </p:nvPr>
+        </p:nvSpPr>
+        <p:spPr/>
+      </p:sp>
+      <p:sp>
+        <p:nvSpPr>
+          <p:cNvPr id="3" name="Notes Placeholder 2"/>
+          <p:cNvSpPr>
+            <a:spLocks noGrp="1"/>
+          </p:cNvSpPr>
+          <p:nvPr>
+            <p:ph type="body" idx="1"/>
+          </p:nvPr>
+        </p:nvSpPr>
+        <p:spPr/>
+        <p:txBody>
+          <a:bodyPr/>
+          <a:lstStyle/>
+          <a:p>
+            <a:r>
+              <a:rPr lang="en-US" dirty="0"/>
+              <a:t/>
+            </a:r>
+            <a:endParaRPr lang="en-US" dirty="0"/>
+          </a:p>
+        </p:txBody>
+      </p:sp>
+      <p:sp>
+        <p:nvSpPr>
+          <p:cNvPr id="4" name="Slide Number Placeholder 3"/>
+          <p:cNvSpPr>
+            <a:spLocks noGrp="1"/>
+          </p:cNvSpPr>
+          <p:nvPr>
+            <p:ph type="sldNum" sz="quarter" idx="10"/>
+          </p:nvPr>
+        </p:nvSpPr>
+        <p:spPr/>
+        <p:txBody>
+          <a:bodyPr/>
+          <a:lstStyle/>
+          <a:p>
+            <a:fld id="{F7021451-1387-4CA6-816F-3879F97B5CBC}" type="slidenum">
+              <a:rPr lang="en-US"/>
+              <a:t>9</a:t>
             </a:fld>
             <a:endParaRPr lang="en-US"/>
           </a:p>
@@ -1476,7 +1921,7 @@
                 <a:ea typeface="Aptos" pitchFamily="34" charset="-122"/>
                 <a:cs typeface="Aptos" pitchFamily="34" charset="-120"/>
               </a:rPr>
-              <a:t>Accurate minutes in line with organisational policy, decisions communicated on time, and actions summarised and tracked</a:t>
+              <a:t>Accurate minutes in line with organisational policy, decisions communicated on time — and an implementation stage that actually delivers</a:t>
             </a:r>
             <a:endParaRPr lang="en-US" sz="1900" dirty="0"/>
           </a:p>
@@ -1893,6 +2338,958 @@
                 <a:cs typeface="Aptos" pitchFamily="34" charset="-120"/>
               </a:rPr>
               <a:t>ITSS Learn · Investec · Corporate Banking Technology</a:t>
+            </a:r>
+            <a:endParaRPr lang="en-US" sz="1800" dirty="0"/>
+          </a:p>
+        </p:txBody>
+      </p:sp>
+    </p:spTree>
+  </p:cSld>
+  <p:clrMapOvr>
+    <a:masterClrMapping/>
+  </p:clrMapOvr>
+</p:sld>
+</file>
+
+<file path=ppt/slides/slide10.xml><?xml version="1.0" encoding="utf-8"?>
+<p:sld xmlns:a="http://schemas.openxmlformats.org/drawingml/2006/main" xmlns:r="http://schemas.openxmlformats.org/officeDocument/2006/relationships" xmlns:p="http://schemas.openxmlformats.org/presentationml/2006/main">
+  <p:cSld name="Slide 10">
+    <p:bg>
+      <p:bgPr>
+        <a:solidFill>
+          <a:srgbClr val="FFFFFF"/>
+        </a:solidFill>
+      </p:bgPr>
+    </p:bg>
+    <p:spTree>
+      <p:nvGrpSpPr>
+        <p:cNvPr id="1" name=""/>
+        <p:cNvGrpSpPr/>
+        <p:nvPr/>
+      </p:nvGrpSpPr>
+      <p:grpSpPr>
+        <a:xfrm>
+          <a:off x="0" y="0"/>
+          <a:ext cx="0" cy="0"/>
+          <a:chOff x="0" y="0"/>
+          <a:chExt cx="0" cy="0"/>
+        </a:xfrm>
+      </p:grpSpPr>
+      <p:sp>
+        <p:nvSpPr>
+          <p:cNvPr id="2" name="Text 0"/>
+          <p:cNvSpPr/>
+          <p:nvPr/>
+        </p:nvSpPr>
+        <p:spPr>
+          <a:xfrm>
+            <a:off x="502920" y="6400800"/>
+            <a:ext cx="10268712" cy="347472"/>
+          </a:xfrm>
+          <a:prstGeom prst="rect">
+            <a:avLst/>
+          </a:prstGeom>
+          <a:noFill/>
+          <a:ln/>
+        </p:spPr>
+        <p:txBody>
+          <a:bodyPr wrap="square" rtlCol="0" anchor="ctr"/>
+          <a:lstStyle/>
+          <a:p>
+            <a:pPr indent="0" marL="0">
+              <a:buNone/>
+            </a:pPr>
+            <a:r>
+              <a:rPr lang="en-US" sz="1800" dirty="0">
+                <a:solidFill>
+                  <a:srgbClr val="6B7280"/>
+                </a:solidFill>
+                <a:latin typeface="Aptos" pitchFamily="34" charset="0"/>
+                <a:ea typeface="Aptos" pitchFamily="34" charset="-122"/>
+                <a:cs typeface="Aptos" pitchFamily="34" charset="-120"/>
+              </a:rPr>
+              <a:t>US 114051 · Conduct a technical practitioners meeting · NQF 5 · 4 credits</a:t>
+            </a:r>
+            <a:endParaRPr lang="en-US" sz="1800" dirty="0"/>
+          </a:p>
+        </p:txBody>
+      </p:sp>
+      <p:sp>
+        <p:nvSpPr>
+          <p:cNvPr id="3" name="Text 1"/>
+          <p:cNvSpPr/>
+          <p:nvPr/>
+        </p:nvSpPr>
+        <p:spPr>
+          <a:xfrm>
+            <a:off x="11045952" y="6400800"/>
+            <a:ext cx="640080" cy="347472"/>
+          </a:xfrm>
+          <a:prstGeom prst="rect">
+            <a:avLst/>
+          </a:prstGeom>
+          <a:noFill/>
+          <a:ln/>
+        </p:spPr>
+        <p:txBody>
+          <a:bodyPr wrap="square" rtlCol="0" anchor="ctr"/>
+          <a:lstStyle/>
+          <a:p>
+            <a:pPr algn="r" indent="0" marL="0">
+              <a:buNone/>
+            </a:pPr>
+            <a:r>
+              <a:rPr lang="en-US" sz="1800" dirty="0">
+                <a:solidFill>
+                  <a:srgbClr val="6B7280"/>
+                </a:solidFill>
+                <a:latin typeface="Aptos" pitchFamily="34" charset="0"/>
+                <a:ea typeface="Aptos" pitchFamily="34" charset="-122"/>
+                <a:cs typeface="Aptos" pitchFamily="34" charset="-120"/>
+              </a:rPr>
+              <a:t>10</a:t>
+            </a:r>
+            <a:endParaRPr lang="en-US" sz="1800" dirty="0"/>
+          </a:p>
+        </p:txBody>
+      </p:sp>
+      <p:sp>
+        <p:nvSpPr>
+          <p:cNvPr id="4" name="Shape 2"/>
+          <p:cNvSpPr/>
+          <p:nvPr/>
+        </p:nvSpPr>
+        <p:spPr>
+          <a:xfrm>
+            <a:off x="0" y="0"/>
+            <a:ext cx="12188952" cy="82296"/>
+          </a:xfrm>
+          <a:prstGeom prst="rect">
+            <a:avLst/>
+          </a:prstGeom>
+          <a:solidFill>
+            <a:srgbClr val="0F6CBD"/>
+          </a:solidFill>
+          <a:ln/>
+        </p:spPr>
+      </p:sp>
+      <p:sp>
+        <p:nvSpPr>
+          <p:cNvPr id="5" name="Text 3"/>
+          <p:cNvSpPr/>
+          <p:nvPr/>
+        </p:nvSpPr>
+        <p:spPr>
+          <a:xfrm>
+            <a:off x="502920" y="237744"/>
+            <a:ext cx="11183112" cy="347472"/>
+          </a:xfrm>
+          <a:prstGeom prst="rect">
+            <a:avLst/>
+          </a:prstGeom>
+          <a:noFill/>
+          <a:ln/>
+        </p:spPr>
+        <p:txBody>
+          <a:bodyPr wrap="square" rtlCol="0" anchor="ctr"/>
+          <a:lstStyle/>
+          <a:p>
+            <a:pPr indent="0" marL="0">
+              <a:buNone/>
+            </a:pPr>
+            <a:r>
+              <a:rPr lang="en-US" sz="1800" b="1" spc="200" kern="0" dirty="0">
+                <a:solidFill>
+                  <a:srgbClr val="0F6CBD"/>
+                </a:solidFill>
+                <a:latin typeface="Aptos" pitchFamily="34" charset="0"/>
+                <a:ea typeface="Aptos" pitchFamily="34" charset="-122"/>
+                <a:cs typeface="Aptos" pitchFamily="34" charset="-120"/>
+              </a:rPr>
+              <a:t>NOW PROVE IT</a:t>
+            </a:r>
+            <a:endParaRPr lang="en-US" sz="1800" dirty="0"/>
+          </a:p>
+        </p:txBody>
+      </p:sp>
+      <p:sp>
+        <p:nvSpPr>
+          <p:cNvPr id="6" name="Text 4"/>
+          <p:cNvSpPr/>
+          <p:nvPr/>
+        </p:nvSpPr>
+        <p:spPr>
+          <a:xfrm>
+            <a:off x="502920" y="585216"/>
+            <a:ext cx="11183112" cy="603504"/>
+          </a:xfrm>
+          <a:prstGeom prst="rect">
+            <a:avLst/>
+          </a:prstGeom>
+          <a:noFill/>
+          <a:ln/>
+        </p:spPr>
+        <p:txBody>
+          <a:bodyPr wrap="square" rtlCol="0" anchor="ctr"/>
+          <a:lstStyle/>
+          <a:p>
+            <a:pPr indent="0" marL="0">
+              <a:buNone/>
+            </a:pPr>
+            <a:r>
+              <a:rPr lang="en-US" sz="3000" b="1" dirty="0">
+                <a:solidFill>
+                  <a:srgbClr val="002050"/>
+                </a:solidFill>
+                <a:latin typeface="Aptos Display" pitchFamily="34" charset="0"/>
+                <a:ea typeface="Aptos Display" pitchFamily="34" charset="-122"/>
+                <a:cs typeface="Aptos Display" pitchFamily="34" charset="-120"/>
+              </a:rPr>
+              <a:t>Your work for Specific Outcome 4</a:t>
+            </a:r>
+            <a:endParaRPr lang="en-US" sz="3000" dirty="0"/>
+          </a:p>
+        </p:txBody>
+      </p:sp>
+      <p:sp>
+        <p:nvSpPr>
+          <p:cNvPr id="7" name="Shape 5"/>
+          <p:cNvSpPr/>
+          <p:nvPr/>
+        </p:nvSpPr>
+        <p:spPr>
+          <a:xfrm>
+            <a:off x="502920" y="1828800"/>
+            <a:ext cx="3605784" cy="2651760"/>
+          </a:xfrm>
+          <a:prstGeom prst="roundRect">
+            <a:avLst>
+              <a:gd name="adj" fmla="val 3103"/>
+            </a:avLst>
+          </a:prstGeom>
+          <a:solidFill>
+            <a:srgbClr val="FFFFFF"/>
+          </a:solidFill>
+          <a:ln w="12700">
+            <a:solidFill>
+              <a:srgbClr val="D5E3F2"/>
+            </a:solidFill>
+            <a:prstDash val="solid"/>
+          </a:ln>
+          <a:effectLst>
+            <a:outerShdw sx="100000" sy="100000" kx="0" ky="0" algn="bl" rotWithShape="0" blurRad="88900" dist="25400" dir="5400000">
+              <a:srgbClr val="9AB4CC">
+                <a:alpha val="30000"/>
+              </a:srgbClr>
+            </a:outerShdw>
+          </a:effectLst>
+        </p:spPr>
+      </p:sp>
+      <p:pic>
+        <p:nvPicPr>
+          <p:cNvPr id="8" name="Image 0" descr="preencoded.png">    </p:cNvPr>
+          <p:cNvPicPr>
+            <a:picLocks noChangeAspect="1"/>
+          </p:cNvPicPr>
+          <p:nvPr/>
+        </p:nvPicPr>
+        <p:blipFill>
+          <a:blip r:embed="rId1">
+            <a:extLst>
+              <a:ext uri="{96DAC541-7B7A-43D3-8B79-37D633B846F1}">
+                <asvg:svgBlip xmlns:asvg="http://schemas.microsoft.com/office/drawing/2016/SVG/main" r:embed="rId2"/>
+              </a:ext>
+            </a:extLst>
+          </a:blip>
+          <a:stretch>
+            <a:fillRect/>
+          </a:stretch>
+        </p:blipFill>
+        <p:spPr>
+          <a:xfrm>
+            <a:off x="667512" y="2011680"/>
+            <a:ext cx="347472" cy="347472"/>
+          </a:xfrm>
+          <a:prstGeom prst="rect">
+            <a:avLst/>
+          </a:prstGeom>
+        </p:spPr>
+      </p:pic>
+      <p:sp>
+        <p:nvSpPr>
+          <p:cNvPr id="9" name="Text 6"/>
+          <p:cNvSpPr/>
+          <p:nvPr/>
+        </p:nvSpPr>
+        <p:spPr>
+          <a:xfrm>
+            <a:off x="1106424" y="1938528"/>
+            <a:ext cx="2837688" cy="777240"/>
+          </a:xfrm>
+          <a:prstGeom prst="rect">
+            <a:avLst/>
+          </a:prstGeom>
+          <a:noFill/>
+          <a:ln/>
+        </p:spPr>
+        <p:txBody>
+          <a:bodyPr wrap="square" rtlCol="0" anchor="ctr"/>
+          <a:lstStyle/>
+          <a:p>
+            <a:pPr indent="0" marL="0">
+              <a:lnSpc>
+                <a:spcPct val="100000"/>
+              </a:lnSpc>
+              <a:buNone/>
+            </a:pPr>
+            <a:r>
+              <a:rPr lang="en-US" sz="2000" b="1" dirty="0">
+                <a:solidFill>
+                  <a:srgbClr val="002050"/>
+                </a:solidFill>
+                <a:latin typeface="Aptos Display" pitchFamily="34" charset="0"/>
+                <a:ea typeface="Aptos Display" pitchFamily="34" charset="-122"/>
+                <a:cs typeface="Aptos Display" pitchFamily="34" charset="-120"/>
+              </a:rPr>
+              <a:t>Questioning session</a:t>
+            </a:r>
+            <a:endParaRPr lang="en-US" sz="2000" dirty="0"/>
+          </a:p>
+        </p:txBody>
+      </p:sp>
+      <p:sp>
+        <p:nvSpPr>
+          <p:cNvPr id="10" name="Text 7"/>
+          <p:cNvSpPr/>
+          <p:nvPr/>
+        </p:nvSpPr>
+        <p:spPr>
+          <a:xfrm>
+            <a:off x="667512" y="2761488"/>
+            <a:ext cx="3276600" cy="1591056"/>
+          </a:xfrm>
+          <a:prstGeom prst="rect">
+            <a:avLst/>
+          </a:prstGeom>
+          <a:noFill/>
+          <a:ln/>
+        </p:spPr>
+        <p:txBody>
+          <a:bodyPr wrap="square" rtlCol="0" anchor="t"/>
+          <a:lstStyle/>
+          <a:p>
+            <a:pPr indent="0" marL="0">
+              <a:lnSpc>
+                <a:spcPct val="110000"/>
+              </a:lnSpc>
+              <a:buNone/>
+            </a:pPr>
+            <a:r>
+              <a:rPr lang="en-US" sz="1800" dirty="0">
+                <a:solidFill>
+                  <a:srgbClr val="6B7280"/>
+                </a:solidFill>
+                <a:latin typeface="Aptos" pitchFamily="34" charset="0"/>
+                <a:ea typeface="Aptos" pitchFamily="34" charset="-122"/>
+                <a:cs typeface="Aptos" pitchFamily="34" charset="-120"/>
+              </a:rPr>
+              <a:t>“Post-meeting follow-up” — typed answers, AI-marked.</a:t>
+            </a:r>
+            <a:endParaRPr lang="en-US" sz="1800" dirty="0"/>
+          </a:p>
+        </p:txBody>
+      </p:sp>
+      <p:sp>
+        <p:nvSpPr>
+          <p:cNvPr id="11" name="Shape 8"/>
+          <p:cNvSpPr/>
+          <p:nvPr/>
+        </p:nvSpPr>
+        <p:spPr>
+          <a:xfrm>
+            <a:off x="4291584" y="1828800"/>
+            <a:ext cx="3605784" cy="2651760"/>
+          </a:xfrm>
+          <a:prstGeom prst="roundRect">
+            <a:avLst>
+              <a:gd name="adj" fmla="val 3103"/>
+            </a:avLst>
+          </a:prstGeom>
+          <a:solidFill>
+            <a:srgbClr val="FFFFFF"/>
+          </a:solidFill>
+          <a:ln w="12700">
+            <a:solidFill>
+              <a:srgbClr val="D5E3F2"/>
+            </a:solidFill>
+            <a:prstDash val="solid"/>
+          </a:ln>
+          <a:effectLst>
+            <a:outerShdw sx="100000" sy="100000" kx="0" ky="0" algn="bl" rotWithShape="0" blurRad="88900" dist="25400" dir="5400000">
+              <a:srgbClr val="9AB4CC">
+                <a:alpha val="30000"/>
+              </a:srgbClr>
+            </a:outerShdw>
+          </a:effectLst>
+        </p:spPr>
+      </p:sp>
+      <p:pic>
+        <p:nvPicPr>
+          <p:cNvPr id="12" name="Image 1" descr="preencoded.png">    </p:cNvPr>
+          <p:cNvPicPr>
+            <a:picLocks noChangeAspect="1"/>
+          </p:cNvPicPr>
+          <p:nvPr/>
+        </p:nvPicPr>
+        <p:blipFill>
+          <a:blip r:embed="rId3">
+            <a:extLst>
+              <a:ext uri="{96DAC541-7B7A-43D3-8B79-37D633B846F1}">
+                <asvg:svgBlip xmlns:asvg="http://schemas.microsoft.com/office/drawing/2016/SVG/main" r:embed="rId4"/>
+              </a:ext>
+            </a:extLst>
+          </a:blip>
+          <a:stretch>
+            <a:fillRect/>
+          </a:stretch>
+        </p:blipFill>
+        <p:spPr>
+          <a:xfrm>
+            <a:off x="4456176" y="2011680"/>
+            <a:ext cx="347472" cy="347472"/>
+          </a:xfrm>
+          <a:prstGeom prst="rect">
+            <a:avLst/>
+          </a:prstGeom>
+        </p:spPr>
+      </p:pic>
+      <p:sp>
+        <p:nvSpPr>
+          <p:cNvPr id="13" name="Text 9"/>
+          <p:cNvSpPr/>
+          <p:nvPr/>
+        </p:nvSpPr>
+        <p:spPr>
+          <a:xfrm>
+            <a:off x="4895088" y="1938528"/>
+            <a:ext cx="2837688" cy="777240"/>
+          </a:xfrm>
+          <a:prstGeom prst="rect">
+            <a:avLst/>
+          </a:prstGeom>
+          <a:noFill/>
+          <a:ln/>
+        </p:spPr>
+        <p:txBody>
+          <a:bodyPr wrap="square" rtlCol="0" anchor="ctr"/>
+          <a:lstStyle/>
+          <a:p>
+            <a:pPr indent="0" marL="0">
+              <a:lnSpc>
+                <a:spcPct val="100000"/>
+              </a:lnSpc>
+              <a:buNone/>
+            </a:pPr>
+            <a:r>
+              <a:rPr lang="en-US" sz="2000" b="1" dirty="0">
+                <a:solidFill>
+                  <a:srgbClr val="002050"/>
+                </a:solidFill>
+                <a:latin typeface="Aptos Display" pitchFamily="34" charset="0"/>
+                <a:ea typeface="Aptos Display" pitchFamily="34" charset="-122"/>
+                <a:cs typeface="Aptos Display" pitchFamily="34" charset="-120"/>
+              </a:rPr>
+              <a:t>Quiz 4 &amp; self assessment</a:t>
+            </a:r>
+            <a:endParaRPr lang="en-US" sz="2000" dirty="0"/>
+          </a:p>
+        </p:txBody>
+      </p:sp>
+      <p:sp>
+        <p:nvSpPr>
+          <p:cNvPr id="14" name="Text 10"/>
+          <p:cNvSpPr/>
+          <p:nvPr/>
+        </p:nvSpPr>
+        <p:spPr>
+          <a:xfrm>
+            <a:off x="4456176" y="2761488"/>
+            <a:ext cx="3276600" cy="1591056"/>
+          </a:xfrm>
+          <a:prstGeom prst="rect">
+            <a:avLst/>
+          </a:prstGeom>
+          <a:noFill/>
+          <a:ln/>
+        </p:spPr>
+        <p:txBody>
+          <a:bodyPr wrap="square" rtlCol="0" anchor="t"/>
+          <a:lstStyle/>
+          <a:p>
+            <a:pPr indent="0" marL="0">
+              <a:lnSpc>
+                <a:spcPct val="110000"/>
+              </a:lnSpc>
+              <a:buNone/>
+            </a:pPr>
+            <a:r>
+              <a:rPr lang="en-US" sz="1800" dirty="0">
+                <a:solidFill>
+                  <a:srgbClr val="6B7280"/>
+                </a:solidFill>
+                <a:latin typeface="Aptos" pitchFamily="34" charset="0"/>
+                <a:ea typeface="Aptos" pitchFamily="34" charset="-122"/>
+                <a:cs typeface="Aptos" pitchFamily="34" charset="-120"/>
+              </a:rPr>
+              <a:t>Post-meeting follow-up quiz, then the honest tick-box self assessment.</a:t>
+            </a:r>
+            <a:endParaRPr lang="en-US" sz="1800" dirty="0"/>
+          </a:p>
+        </p:txBody>
+      </p:sp>
+      <p:sp>
+        <p:nvSpPr>
+          <p:cNvPr id="15" name="Shape 11"/>
+          <p:cNvSpPr/>
+          <p:nvPr/>
+        </p:nvSpPr>
+        <p:spPr>
+          <a:xfrm>
+            <a:off x="8080248" y="1828800"/>
+            <a:ext cx="3605784" cy="2651760"/>
+          </a:xfrm>
+          <a:prstGeom prst="roundRect">
+            <a:avLst>
+              <a:gd name="adj" fmla="val 3103"/>
+            </a:avLst>
+          </a:prstGeom>
+          <a:solidFill>
+            <a:srgbClr val="FFFFFF"/>
+          </a:solidFill>
+          <a:ln w="12700">
+            <a:solidFill>
+              <a:srgbClr val="D5E3F2"/>
+            </a:solidFill>
+            <a:prstDash val="solid"/>
+          </a:ln>
+          <a:effectLst>
+            <a:outerShdw sx="100000" sy="100000" kx="0" ky="0" algn="bl" rotWithShape="0" blurRad="88900" dist="25400" dir="5400000">
+              <a:srgbClr val="9AB4CC">
+                <a:alpha val="30000"/>
+              </a:srgbClr>
+            </a:outerShdw>
+          </a:effectLst>
+        </p:spPr>
+      </p:sp>
+      <p:pic>
+        <p:nvPicPr>
+          <p:cNvPr id="16" name="Image 2" descr="preencoded.png">    </p:cNvPr>
+          <p:cNvPicPr>
+            <a:picLocks noChangeAspect="1"/>
+          </p:cNvPicPr>
+          <p:nvPr/>
+        </p:nvPicPr>
+        <p:blipFill>
+          <a:blip r:embed="rId5">
+            <a:extLst>
+              <a:ext uri="{96DAC541-7B7A-43D3-8B79-37D633B846F1}">
+                <asvg:svgBlip xmlns:asvg="http://schemas.microsoft.com/office/drawing/2016/SVG/main" r:embed="rId6"/>
+              </a:ext>
+            </a:extLst>
+          </a:blip>
+          <a:stretch>
+            <a:fillRect/>
+          </a:stretch>
+        </p:blipFill>
+        <p:spPr>
+          <a:xfrm>
+            <a:off x="8244840" y="2011680"/>
+            <a:ext cx="347472" cy="347472"/>
+          </a:xfrm>
+          <a:prstGeom prst="rect">
+            <a:avLst/>
+          </a:prstGeom>
+        </p:spPr>
+      </p:pic>
+      <p:sp>
+        <p:nvSpPr>
+          <p:cNvPr id="17" name="Text 12"/>
+          <p:cNvSpPr/>
+          <p:nvPr/>
+        </p:nvSpPr>
+        <p:spPr>
+          <a:xfrm>
+            <a:off x="8683752" y="1938528"/>
+            <a:ext cx="2837688" cy="777240"/>
+          </a:xfrm>
+          <a:prstGeom prst="rect">
+            <a:avLst/>
+          </a:prstGeom>
+          <a:noFill/>
+          <a:ln/>
+        </p:spPr>
+        <p:txBody>
+          <a:bodyPr wrap="square" rtlCol="0" anchor="ctr"/>
+          <a:lstStyle/>
+          <a:p>
+            <a:pPr indent="0" marL="0">
+              <a:lnSpc>
+                <a:spcPct val="100000"/>
+              </a:lnSpc>
+              <a:buNone/>
+            </a:pPr>
+            <a:r>
+              <a:rPr lang="en-US" sz="2000" b="1" dirty="0">
+                <a:solidFill>
+                  <a:srgbClr val="002050"/>
+                </a:solidFill>
+                <a:latin typeface="Aptos Display" pitchFamily="34" charset="0"/>
+                <a:ea typeface="Aptos Display" pitchFamily="34" charset="-122"/>
+                <a:cs typeface="Aptos Display" pitchFamily="34" charset="-120"/>
+              </a:rPr>
+              <a:t>Logbook — Meeting portfolio</a:t>
+            </a:r>
+            <a:endParaRPr lang="en-US" sz="2000" dirty="0"/>
+          </a:p>
+        </p:txBody>
+      </p:sp>
+      <p:sp>
+        <p:nvSpPr>
+          <p:cNvPr id="18" name="Text 13"/>
+          <p:cNvSpPr/>
+          <p:nvPr/>
+        </p:nvSpPr>
+        <p:spPr>
+          <a:xfrm>
+            <a:off x="8244840" y="2761488"/>
+            <a:ext cx="3276600" cy="1591056"/>
+          </a:xfrm>
+          <a:prstGeom prst="rect">
+            <a:avLst/>
+          </a:prstGeom>
+          <a:noFill/>
+          <a:ln/>
+        </p:spPr>
+        <p:txBody>
+          <a:bodyPr wrap="square" rtlCol="0" anchor="t"/>
+          <a:lstStyle/>
+          <a:p>
+            <a:pPr indent="0" marL="0">
+              <a:lnSpc>
+                <a:spcPct val="110000"/>
+              </a:lnSpc>
+              <a:buNone/>
+            </a:pPr>
+            <a:r>
+              <a:rPr lang="en-US" sz="1800" dirty="0">
+                <a:solidFill>
+                  <a:srgbClr val="6B7280"/>
+                </a:solidFill>
+                <a:latin typeface="Aptos" pitchFamily="34" charset="0"/>
+                <a:ea typeface="Aptos" pitchFamily="34" charset="-122"/>
+                <a:cs typeface="Aptos" pitchFamily="34" charset="-120"/>
+              </a:rPr>
+              <a:t>Notice and agenda, invitations, attendance register, minutes and action summary. Mark it 114051.</a:t>
+            </a:r>
+            <a:endParaRPr lang="en-US" sz="1800" dirty="0"/>
+          </a:p>
+        </p:txBody>
+      </p:sp>
+    </p:spTree>
+  </p:cSld>
+  <p:clrMapOvr>
+    <a:masterClrMapping/>
+  </p:clrMapOvr>
+</p:sld>
+</file>
+
+<file path=ppt/slides/slide11.xml><?xml version="1.0" encoding="utf-8"?>
+<p:sld xmlns:a="http://schemas.openxmlformats.org/drawingml/2006/main" xmlns:r="http://schemas.openxmlformats.org/officeDocument/2006/relationships" xmlns:p="http://schemas.openxmlformats.org/presentationml/2006/main">
+  <p:cSld name="Slide 11">
+    <p:bg>
+      <p:bgPr>
+        <a:solidFill>
+          <a:srgbClr val="002050"/>
+        </a:solidFill>
+      </p:bgPr>
+    </p:bg>
+    <p:spTree>
+      <p:nvGrpSpPr>
+        <p:cNvPr id="1" name=""/>
+        <p:cNvGrpSpPr/>
+        <p:nvPr/>
+      </p:nvGrpSpPr>
+      <p:grpSpPr>
+        <a:xfrm>
+          <a:off x="0" y="0"/>
+          <a:ext cx="0" cy="0"/>
+          <a:chOff x="0" y="0"/>
+          <a:chExt cx="0" cy="0"/>
+        </a:xfrm>
+      </p:grpSpPr>
+      <p:sp>
+        <p:nvSpPr>
+          <p:cNvPr id="2" name="Text 0"/>
+          <p:cNvSpPr/>
+          <p:nvPr/>
+        </p:nvSpPr>
+        <p:spPr>
+          <a:xfrm>
+            <a:off x="502920" y="6400800"/>
+            <a:ext cx="10268712" cy="347472"/>
+          </a:xfrm>
+          <a:prstGeom prst="rect">
+            <a:avLst/>
+          </a:prstGeom>
+          <a:noFill/>
+          <a:ln/>
+        </p:spPr>
+        <p:txBody>
+          <a:bodyPr wrap="square" rtlCol="0" anchor="ctr"/>
+          <a:lstStyle/>
+          <a:p>
+            <a:pPr indent="0" marL="0">
+              <a:buNone/>
+            </a:pPr>
+            <a:r>
+              <a:rPr lang="en-US" sz="1800" dirty="0">
+                <a:solidFill>
+                  <a:srgbClr val="6B7280"/>
+                </a:solidFill>
+                <a:latin typeface="Aptos" pitchFamily="34" charset="0"/>
+                <a:ea typeface="Aptos" pitchFamily="34" charset="-122"/>
+                <a:cs typeface="Aptos" pitchFamily="34" charset="-120"/>
+              </a:rPr>
+              <a:t>US 114051 · Conduct a technical practitioners meeting · NQF 5 · 4 credits</a:t>
+            </a:r>
+            <a:endParaRPr lang="en-US" sz="1800" dirty="0"/>
+          </a:p>
+        </p:txBody>
+      </p:sp>
+      <p:sp>
+        <p:nvSpPr>
+          <p:cNvPr id="3" name="Text 1"/>
+          <p:cNvSpPr/>
+          <p:nvPr/>
+        </p:nvSpPr>
+        <p:spPr>
+          <a:xfrm>
+            <a:off x="11045952" y="6400800"/>
+            <a:ext cx="640080" cy="347472"/>
+          </a:xfrm>
+          <a:prstGeom prst="rect">
+            <a:avLst/>
+          </a:prstGeom>
+          <a:noFill/>
+          <a:ln/>
+        </p:spPr>
+        <p:txBody>
+          <a:bodyPr wrap="square" rtlCol="0" anchor="ctr"/>
+          <a:lstStyle/>
+          <a:p>
+            <a:pPr algn="r" indent="0" marL="0">
+              <a:buNone/>
+            </a:pPr>
+            <a:r>
+              <a:rPr lang="en-US" sz="1800" dirty="0">
+                <a:solidFill>
+                  <a:srgbClr val="6B7280"/>
+                </a:solidFill>
+                <a:latin typeface="Aptos" pitchFamily="34" charset="0"/>
+                <a:ea typeface="Aptos" pitchFamily="34" charset="-122"/>
+                <a:cs typeface="Aptos" pitchFamily="34" charset="-120"/>
+              </a:rPr>
+              <a:t>11</a:t>
+            </a:r>
+            <a:endParaRPr lang="en-US" sz="1800" dirty="0"/>
+          </a:p>
+        </p:txBody>
+      </p:sp>
+      <p:sp>
+        <p:nvSpPr>
+          <p:cNvPr id="4" name="Shape 2"/>
+          <p:cNvSpPr/>
+          <p:nvPr/>
+        </p:nvSpPr>
+        <p:spPr>
+          <a:xfrm>
+            <a:off x="0" y="0"/>
+            <a:ext cx="12188952" cy="82296"/>
+          </a:xfrm>
+          <a:prstGeom prst="rect">
+            <a:avLst/>
+          </a:prstGeom>
+          <a:solidFill>
+            <a:srgbClr val="0F6CBD"/>
+          </a:solidFill>
+          <a:ln/>
+        </p:spPr>
+      </p:sp>
+      <p:sp>
+        <p:nvSpPr>
+          <p:cNvPr id="5" name="Shape 3"/>
+          <p:cNvSpPr/>
+          <p:nvPr/>
+        </p:nvSpPr>
+        <p:spPr>
+          <a:xfrm>
+            <a:off x="0" y="0"/>
+            <a:ext cx="12188952" cy="109728"/>
+          </a:xfrm>
+          <a:prstGeom prst="rect">
+            <a:avLst/>
+          </a:prstGeom>
+          <a:solidFill>
+            <a:srgbClr val="0F6CBD"/>
+          </a:solidFill>
+          <a:ln/>
+        </p:spPr>
+      </p:sp>
+      <p:pic>
+        <p:nvPicPr>
+          <p:cNvPr id="6" name="Image 0" descr="preencoded.png">    </p:cNvPr>
+          <p:cNvPicPr>
+            <a:picLocks noChangeAspect="1"/>
+          </p:cNvPicPr>
+          <p:nvPr/>
+        </p:nvPicPr>
+        <p:blipFill>
+          <a:blip r:embed="rId1">
+            <a:extLst>
+              <a:ext uri="{96DAC541-7B7A-43D3-8B79-37D633B846F1}">
+                <asvg:svgBlip xmlns:asvg="http://schemas.microsoft.com/office/drawing/2016/SVG/main" r:embed="rId2"/>
+              </a:ext>
+            </a:extLst>
+          </a:blip>
+          <a:stretch>
+            <a:fillRect/>
+          </a:stretch>
+        </p:blipFill>
+        <p:spPr>
+          <a:xfrm>
+            <a:off x="502920" y="1463040"/>
+            <a:ext cx="640080" cy="640080"/>
+          </a:xfrm>
+          <a:prstGeom prst="rect">
+            <a:avLst/>
+          </a:prstGeom>
+        </p:spPr>
+      </p:pic>
+      <p:sp>
+        <p:nvSpPr>
+          <p:cNvPr id="7" name="Text 4"/>
+          <p:cNvSpPr/>
+          <p:nvPr/>
+        </p:nvSpPr>
+        <p:spPr>
+          <a:xfrm>
+            <a:off x="502920" y="2240280"/>
+            <a:ext cx="11183112" cy="1280160"/>
+          </a:xfrm>
+          <a:prstGeom prst="rect">
+            <a:avLst/>
+          </a:prstGeom>
+          <a:noFill/>
+          <a:ln/>
+        </p:spPr>
+        <p:txBody>
+          <a:bodyPr wrap="square" rtlCol="0" anchor="ctr"/>
+          <a:lstStyle/>
+          <a:p>
+            <a:pPr indent="0" marL="0">
+              <a:buNone/>
+            </a:pPr>
+            <a:r>
+              <a:rPr lang="en-US" sz="3600" b="1" dirty="0">
+                <a:solidFill>
+                  <a:srgbClr val="FFFFFF"/>
+                </a:solidFill>
+                <a:latin typeface="Aptos Display" pitchFamily="34" charset="0"/>
+                <a:ea typeface="Aptos Display" pitchFamily="34" charset="-122"/>
+                <a:cs typeface="Aptos Display" pitchFamily="34" charset="-120"/>
+              </a:rPr>
+              <a:t>The meeting is not over when it ends.</a:t>
+            </a:r>
+            <a:endParaRPr lang="en-US" sz="3600" dirty="0"/>
+          </a:p>
+        </p:txBody>
+      </p:sp>
+      <p:sp>
+        <p:nvSpPr>
+          <p:cNvPr id="8" name="Text 5"/>
+          <p:cNvSpPr/>
+          <p:nvPr/>
+        </p:nvSpPr>
+        <p:spPr>
+          <a:xfrm>
+            <a:off x="502920" y="3611880"/>
+            <a:ext cx="10058400" cy="1280160"/>
+          </a:xfrm>
+          <a:prstGeom prst="rect">
+            <a:avLst/>
+          </a:prstGeom>
+          <a:noFill/>
+          <a:ln/>
+        </p:spPr>
+        <p:txBody>
+          <a:bodyPr wrap="square" rtlCol="0" anchor="ctr"/>
+          <a:lstStyle/>
+          <a:p>
+            <a:pPr indent="0" marL="0">
+              <a:lnSpc>
+                <a:spcPct val="125000"/>
+              </a:lnSpc>
+              <a:buNone/>
+            </a:pPr>
+            <a:r>
+              <a:rPr lang="en-US" sz="1800" dirty="0">
+                <a:solidFill>
+                  <a:srgbClr val="B9D6F2"/>
+                </a:solidFill>
+                <a:latin typeface="Aptos" pitchFamily="34" charset="0"/>
+                <a:ea typeface="Aptos" pitchFamily="34" charset="-122"/>
+                <a:cs typeface="Aptos" pitchFamily="34" charset="-120"/>
+              </a:rPr>
+              <a:t>Minutes that stand as the record » decisions communicated in format and on time » an implementation plan with owners, tracking and awareness — follow-up is what turns discussion into delivery.</a:t>
+            </a:r>
+            <a:endParaRPr lang="en-US" sz="1800" dirty="0"/>
+          </a:p>
+        </p:txBody>
+      </p:sp>
+      <p:sp>
+        <p:nvSpPr>
+          <p:cNvPr id="9" name="Text 6"/>
+          <p:cNvSpPr/>
+          <p:nvPr/>
+        </p:nvSpPr>
+        <p:spPr>
+          <a:xfrm>
+            <a:off x="502920" y="6291072"/>
+            <a:ext cx="11183112" cy="365760"/>
+          </a:xfrm>
+          <a:prstGeom prst="rect">
+            <a:avLst/>
+          </a:prstGeom>
+          <a:noFill/>
+          <a:ln/>
+        </p:spPr>
+        <p:txBody>
+          <a:bodyPr wrap="square" rtlCol="0" anchor="ctr"/>
+          <a:lstStyle/>
+          <a:p>
+            <a:pPr indent="0" marL="0">
+              <a:buNone/>
+            </a:pPr>
+            <a:r>
+              <a:rPr lang="en-US" sz="1800" dirty="0">
+                <a:solidFill>
+                  <a:srgbClr val="6E93BC"/>
+                </a:solidFill>
+                <a:latin typeface="Aptos" pitchFamily="34" charset="0"/>
+                <a:ea typeface="Aptos" pitchFamily="34" charset="-122"/>
+                <a:cs typeface="Aptos" pitchFamily="34" charset="-120"/>
+              </a:rPr>
+              <a:t>US 114051 · National Certificate: IT — System Support · SAQA ID 48573 · ITSS Learn</a:t>
             </a:r>
             <a:endParaRPr lang="en-US" sz="1800" dirty="0"/>
           </a:p>
@@ -2142,7 +3539,7 @@
                 <a:ea typeface="Aptos" pitchFamily="34" charset="-122"/>
                 <a:cs typeface="Aptos" pitchFamily="34" charset="-120"/>
               </a:rPr>
-              <a:t>Conduct post-meeting follow-up for a technical meeting. You will be assessed against these criteria:</a:t>
+              <a:t>Conduct post-meeting follow-up: circulation of minutes, recommendations, motions passed and feedback. The assessment criteria:</a:t>
             </a:r>
             <a:endParaRPr lang="en-US" sz="1800" dirty="0"/>
           </a:p>
@@ -2290,7 +3687,7 @@
                 <a:ea typeface="Aptos" pitchFamily="34" charset="-122"/>
                 <a:cs typeface="Aptos" pitchFamily="34" charset="-120"/>
               </a:rPr>
-              <a:t>Minutes are accurately produced and comply with organisational policy.</a:t>
+              <a:t>Minutes are produced accurately and in line with the policy of the organisation.</a:t>
             </a:r>
             <a:endParaRPr lang="en-US" sz="1800" dirty="0"/>
           </a:p>
@@ -2438,7 +3835,7 @@
                 <a:ea typeface="Aptos" pitchFamily="34" charset="-122"/>
                 <a:cs typeface="Aptos" pitchFamily="34" charset="-120"/>
               </a:rPr>
-              <a:t>In the required format and within the required timeframe.</a:t>
+              <a:t>Agreed records of discussion reach interested parties in the format and time frame the meeting type and organisation require.</a:t>
             </a:r>
             <a:endParaRPr lang="en-US" sz="1800" dirty="0"/>
           </a:p>
@@ -2586,7 +3983,7 @@
                 <a:ea typeface="Aptos" pitchFamily="34" charset="-122"/>
                 <a:cs typeface="Aptos" pitchFamily="34" charset="-120"/>
               </a:rPr>
-              <a:t>Summaries of discussions and actions meet the format requirements.</a:t>
+              <a:t>A summary of discussions and actions that meets format requirements.</a:t>
             </a:r>
             <a:endParaRPr lang="en-US" sz="1800" dirty="0"/>
           </a:p>
@@ -2794,7 +4191,7 @@
                 <a:ea typeface="Aptos Display" pitchFamily="34" charset="-122"/>
                 <a:cs typeface="Aptos Display" pitchFamily="34" charset="-120"/>
               </a:rPr>
-              <a:t>What good minutes contain</a:t>
+              <a:t>Why minutes matter</a:t>
             </a:r>
             <a:endParaRPr lang="en-US" sz="3000" dirty="0"/>
           </a:p>
@@ -2808,8 +4205,8 @@
         </p:nvSpPr>
         <p:spPr>
           <a:xfrm>
-            <a:off x="502920" y="1280160"/>
-            <a:ext cx="11183112" cy="502920"/>
+            <a:off x="502920" y="1554480"/>
+            <a:ext cx="11183112" cy="4572000"/>
           </a:xfrm>
           <a:prstGeom prst="rect">
             <a:avLst/>
@@ -2819,6 +4216,800 @@
         </p:spPr>
         <p:txBody>
           <a:bodyPr wrap="square" rtlCol="0" anchor="t"/>
+          <a:lstStyle/>
+          <a:p>
+            <a:pPr marL="203200" indent="-203200">
+              <a:lnSpc>
+                <a:spcPct val="120000"/>
+              </a:lnSpc>
+              <a:spcAft>
+                <a:spcPts val="1000"/>
+              </a:spcAft>
+              <a:buSzPct val="100000"/>
+              <a:buChar char="•"/>
+            </a:pPr>
+            <a:r>
+              <a:rPr lang="en-US" sz="1800" dirty="0">
+                <a:solidFill>
+                  <a:srgbClr val="002050"/>
+                </a:solidFill>
+                <a:latin typeface="Aptos" pitchFamily="34" charset="0"/>
+                <a:ea typeface="Aptos" pitchFamily="34" charset="-122"/>
+                <a:cs typeface="Aptos" pitchFamily="34" charset="-120"/>
+              </a:rPr>
+              <a:t>Minutes form a historical record of a group's work — a record of decisions and details when people's memories fail or when they disagree.</a:t>
+            </a:r>
+            <a:endParaRPr lang="en-US" sz="1800" dirty="0"/>
+          </a:p>
+          <a:p>
+            <a:pPr marL="203200" indent="-203200">
+              <a:lnSpc>
+                <a:spcPct val="120000"/>
+              </a:lnSpc>
+              <a:spcAft>
+                <a:spcPts val="1000"/>
+              </a:spcAft>
+              <a:buSzPct val="100000"/>
+              <a:buChar char="•"/>
+            </a:pPr>
+            <a:r>
+              <a:rPr lang="en-US" sz="1800" dirty="0">
+                <a:solidFill>
+                  <a:srgbClr val="002050"/>
+                </a:solidFill>
+                <a:latin typeface="Aptos" pitchFamily="34" charset="0"/>
+                <a:ea typeface="Aptos" pitchFamily="34" charset="-122"/>
+                <a:cs typeface="Aptos" pitchFamily="34" charset="-120"/>
+              </a:rPr>
+              <a:t>They remind people of assignments they have taken on and the deadlines they need to meet.</a:t>
+            </a:r>
+            <a:endParaRPr lang="en-US" sz="1800" dirty="0"/>
+          </a:p>
+          <a:p>
+            <a:pPr marL="203200" indent="-203200">
+              <a:lnSpc>
+                <a:spcPct val="120000"/>
+              </a:lnSpc>
+              <a:spcAft>
+                <a:spcPts val="1000"/>
+              </a:spcAft>
+              <a:buSzPct val="100000"/>
+              <a:buChar char="•"/>
+            </a:pPr>
+            <a:r>
+              <a:rPr lang="en-US" sz="1800" dirty="0">
+                <a:solidFill>
+                  <a:srgbClr val="002050"/>
+                </a:solidFill>
+                <a:latin typeface="Aptos" pitchFamily="34" charset="0"/>
+                <a:ea typeface="Aptos" pitchFamily="34" charset="-122"/>
+                <a:cs typeface="Aptos" pitchFamily="34" charset="-120"/>
+              </a:rPr>
+              <a:t>They inform those not present of what happened at the meeting.</a:t>
+            </a:r>
+            <a:endParaRPr lang="en-US" sz="1800" dirty="0"/>
+          </a:p>
+          <a:p>
+            <a:pPr marL="203200" indent="-203200">
+              <a:lnSpc>
+                <a:spcPct val="120000"/>
+              </a:lnSpc>
+              <a:spcAft>
+                <a:spcPts val="1000"/>
+              </a:spcAft>
+              <a:buSzPct val="100000"/>
+              <a:buChar char="•"/>
+            </a:pPr>
+            <a:r>
+              <a:rPr lang="en-US" sz="1800" dirty="0">
+                <a:solidFill>
+                  <a:srgbClr val="002050"/>
+                </a:solidFill>
+                <a:latin typeface="Aptos" pitchFamily="34" charset="0"/>
+                <a:ea typeface="Aptos" pitchFamily="34" charset="-122"/>
+                <a:cs typeface="Aptos" pitchFamily="34" charset="-120"/>
+              </a:rPr>
+              <a:t>They give future members a way to build on past successes and avoid reinventing the wheel.</a:t>
+            </a:r>
+            <a:endParaRPr lang="en-US" sz="1800" dirty="0"/>
+          </a:p>
+          <a:p>
+            <a:pPr marL="203200" indent="-203200">
+              <a:lnSpc>
+                <a:spcPct val="120000"/>
+              </a:lnSpc>
+              <a:spcAft>
+                <a:spcPts val="1000"/>
+              </a:spcAft>
+              <a:buSzPct val="100000"/>
+              <a:buChar char="•"/>
+            </a:pPr>
+            <a:r>
+              <a:rPr lang="en-US" sz="1800" dirty="0">
+                <a:solidFill>
+                  <a:srgbClr val="002050"/>
+                </a:solidFill>
+                <a:latin typeface="Aptos" pitchFamily="34" charset="0"/>
+                <a:ea typeface="Aptos" pitchFamily="34" charset="-122"/>
+                <a:cs typeface="Aptos" pitchFamily="34" charset="-120"/>
+              </a:rPr>
+              <a:t>Accurate minutes prevent arguments about previous decisions — and are the guide for drawing up the next agenda and the annual report.</a:t>
+            </a:r>
+            <a:endParaRPr lang="en-US" sz="1800" dirty="0"/>
+          </a:p>
+        </p:txBody>
+      </p:sp>
+    </p:spTree>
+  </p:cSld>
+  <p:clrMapOvr>
+    <a:masterClrMapping/>
+  </p:clrMapOvr>
+</p:sld>
+</file>
+
+<file path=ppt/slides/slide4.xml><?xml version="1.0" encoding="utf-8"?>
+<p:sld xmlns:a="http://schemas.openxmlformats.org/drawingml/2006/main" xmlns:r="http://schemas.openxmlformats.org/officeDocument/2006/relationships" xmlns:p="http://schemas.openxmlformats.org/presentationml/2006/main">
+  <p:cSld name="Slide 4">
+    <p:bg>
+      <p:bgPr>
+        <a:solidFill>
+          <a:srgbClr val="FFFFFF"/>
+        </a:solidFill>
+      </p:bgPr>
+    </p:bg>
+    <p:spTree>
+      <p:nvGrpSpPr>
+        <p:cNvPr id="1" name=""/>
+        <p:cNvGrpSpPr/>
+        <p:nvPr/>
+      </p:nvGrpSpPr>
+      <p:grpSpPr>
+        <a:xfrm>
+          <a:off x="0" y="0"/>
+          <a:ext cx="0" cy="0"/>
+          <a:chOff x="0" y="0"/>
+          <a:chExt cx="0" cy="0"/>
+        </a:xfrm>
+      </p:grpSpPr>
+      <p:sp>
+        <p:nvSpPr>
+          <p:cNvPr id="2" name="Text 0"/>
+          <p:cNvSpPr/>
+          <p:nvPr/>
+        </p:nvSpPr>
+        <p:spPr>
+          <a:xfrm>
+            <a:off x="502920" y="6400800"/>
+            <a:ext cx="10268712" cy="347472"/>
+          </a:xfrm>
+          <a:prstGeom prst="rect">
+            <a:avLst/>
+          </a:prstGeom>
+          <a:noFill/>
+          <a:ln/>
+        </p:spPr>
+        <p:txBody>
+          <a:bodyPr wrap="square" rtlCol="0" anchor="ctr"/>
+          <a:lstStyle/>
+          <a:p>
+            <a:pPr indent="0" marL="0">
+              <a:buNone/>
+            </a:pPr>
+            <a:r>
+              <a:rPr lang="en-US" sz="1800" dirty="0">
+                <a:solidFill>
+                  <a:srgbClr val="6B7280"/>
+                </a:solidFill>
+                <a:latin typeface="Aptos" pitchFamily="34" charset="0"/>
+                <a:ea typeface="Aptos" pitchFamily="34" charset="-122"/>
+                <a:cs typeface="Aptos" pitchFamily="34" charset="-120"/>
+              </a:rPr>
+              <a:t>US 114051 · Conduct a technical practitioners meeting · NQF 5 · 4 credits</a:t>
+            </a:r>
+            <a:endParaRPr lang="en-US" sz="1800" dirty="0"/>
+          </a:p>
+        </p:txBody>
+      </p:sp>
+      <p:sp>
+        <p:nvSpPr>
+          <p:cNvPr id="3" name="Text 1"/>
+          <p:cNvSpPr/>
+          <p:nvPr/>
+        </p:nvSpPr>
+        <p:spPr>
+          <a:xfrm>
+            <a:off x="11045952" y="6400800"/>
+            <a:ext cx="640080" cy="347472"/>
+          </a:xfrm>
+          <a:prstGeom prst="rect">
+            <a:avLst/>
+          </a:prstGeom>
+          <a:noFill/>
+          <a:ln/>
+        </p:spPr>
+        <p:txBody>
+          <a:bodyPr wrap="square" rtlCol="0" anchor="ctr"/>
+          <a:lstStyle/>
+          <a:p>
+            <a:pPr algn="r" indent="0" marL="0">
+              <a:buNone/>
+            </a:pPr>
+            <a:r>
+              <a:rPr lang="en-US" sz="1800" dirty="0">
+                <a:solidFill>
+                  <a:srgbClr val="6B7280"/>
+                </a:solidFill>
+                <a:latin typeface="Aptos" pitchFamily="34" charset="0"/>
+                <a:ea typeface="Aptos" pitchFamily="34" charset="-122"/>
+                <a:cs typeface="Aptos" pitchFamily="34" charset="-120"/>
+              </a:rPr>
+              <a:t>4</a:t>
+            </a:r>
+            <a:endParaRPr lang="en-US" sz="1800" dirty="0"/>
+          </a:p>
+        </p:txBody>
+      </p:sp>
+      <p:sp>
+        <p:nvSpPr>
+          <p:cNvPr id="4" name="Shape 2"/>
+          <p:cNvSpPr/>
+          <p:nvPr/>
+        </p:nvSpPr>
+        <p:spPr>
+          <a:xfrm>
+            <a:off x="0" y="0"/>
+            <a:ext cx="12188952" cy="82296"/>
+          </a:xfrm>
+          <a:prstGeom prst="rect">
+            <a:avLst/>
+          </a:prstGeom>
+          <a:solidFill>
+            <a:srgbClr val="0F6CBD"/>
+          </a:solidFill>
+          <a:ln/>
+        </p:spPr>
+      </p:sp>
+      <p:sp>
+        <p:nvSpPr>
+          <p:cNvPr id="5" name="Text 3"/>
+          <p:cNvSpPr/>
+          <p:nvPr/>
+        </p:nvSpPr>
+        <p:spPr>
+          <a:xfrm>
+            <a:off x="502920" y="237744"/>
+            <a:ext cx="11183112" cy="347472"/>
+          </a:xfrm>
+          <a:prstGeom prst="rect">
+            <a:avLst/>
+          </a:prstGeom>
+          <a:noFill/>
+          <a:ln/>
+        </p:spPr>
+        <p:txBody>
+          <a:bodyPr wrap="square" rtlCol="0" anchor="ctr"/>
+          <a:lstStyle/>
+          <a:p>
+            <a:pPr indent="0" marL="0">
+              <a:buNone/>
+            </a:pPr>
+            <a:r>
+              <a:rPr lang="en-US" sz="1800" b="1" spc="200" kern="0" dirty="0">
+                <a:solidFill>
+                  <a:srgbClr val="0F6CBD"/>
+                </a:solidFill>
+                <a:latin typeface="Aptos" pitchFamily="34" charset="0"/>
+                <a:ea typeface="Aptos" pitchFamily="34" charset="-122"/>
+                <a:cs typeface="Aptos" pitchFamily="34" charset="-120"/>
+              </a:rPr>
+              <a:t>POST-MEETING FOLLOW-UP</a:t>
+            </a:r>
+            <a:endParaRPr lang="en-US" sz="1800" dirty="0"/>
+          </a:p>
+        </p:txBody>
+      </p:sp>
+      <p:sp>
+        <p:nvSpPr>
+          <p:cNvPr id="6" name="Text 4"/>
+          <p:cNvSpPr/>
+          <p:nvPr/>
+        </p:nvSpPr>
+        <p:spPr>
+          <a:xfrm>
+            <a:off x="502920" y="585216"/>
+            <a:ext cx="11183112" cy="603504"/>
+          </a:xfrm>
+          <a:prstGeom prst="rect">
+            <a:avLst/>
+          </a:prstGeom>
+          <a:noFill/>
+          <a:ln/>
+        </p:spPr>
+        <p:txBody>
+          <a:bodyPr wrap="square" rtlCol="0" anchor="ctr"/>
+          <a:lstStyle/>
+          <a:p>
+            <a:pPr indent="0" marL="0">
+              <a:buNone/>
+            </a:pPr>
+            <a:r>
+              <a:rPr lang="en-US" sz="3000" b="1" dirty="0">
+                <a:solidFill>
+                  <a:srgbClr val="002050"/>
+                </a:solidFill>
+                <a:latin typeface="Aptos Display" pitchFamily="34" charset="0"/>
+                <a:ea typeface="Aptos Display" pitchFamily="34" charset="-122"/>
+                <a:cs typeface="Aptos Display" pitchFamily="34" charset="-120"/>
+              </a:rPr>
+              <a:t>Taking good minutes — three skills</a:t>
+            </a:r>
+            <a:endParaRPr lang="en-US" sz="3000" dirty="0"/>
+          </a:p>
+        </p:txBody>
+      </p:sp>
+      <p:sp>
+        <p:nvSpPr>
+          <p:cNvPr id="7" name="Shape 5"/>
+          <p:cNvSpPr/>
+          <p:nvPr/>
+        </p:nvSpPr>
+        <p:spPr>
+          <a:xfrm>
+            <a:off x="502920" y="1645920"/>
+            <a:ext cx="3605784" cy="2743200"/>
+          </a:xfrm>
+          <a:prstGeom prst="roundRect">
+            <a:avLst>
+              <a:gd name="adj" fmla="val 3000"/>
+            </a:avLst>
+          </a:prstGeom>
+          <a:solidFill>
+            <a:srgbClr val="FFFFFF"/>
+          </a:solidFill>
+          <a:ln w="12700">
+            <a:solidFill>
+              <a:srgbClr val="D5E3F2"/>
+            </a:solidFill>
+            <a:prstDash val="solid"/>
+          </a:ln>
+          <a:effectLst>
+            <a:outerShdw sx="100000" sy="100000" kx="0" ky="0" algn="bl" rotWithShape="0" blurRad="88900" dist="25400" dir="5400000">
+              <a:srgbClr val="9AB4CC">
+                <a:alpha val="30000"/>
+              </a:srgbClr>
+            </a:outerShdw>
+          </a:effectLst>
+        </p:spPr>
+      </p:sp>
+      <p:pic>
+        <p:nvPicPr>
+          <p:cNvPr id="8" name="Image 0" descr="preencoded.png">    </p:cNvPr>
+          <p:cNvPicPr>
+            <a:picLocks noChangeAspect="1"/>
+          </p:cNvPicPr>
+          <p:nvPr/>
+        </p:nvPicPr>
+        <p:blipFill>
+          <a:blip r:embed="rId1">
+            <a:extLst>
+              <a:ext uri="{96DAC541-7B7A-43D3-8B79-37D633B846F1}">
+                <asvg:svgBlip xmlns:asvg="http://schemas.microsoft.com/office/drawing/2016/SVG/main" r:embed="rId2"/>
+              </a:ext>
+            </a:extLst>
+          </a:blip>
+          <a:stretch>
+            <a:fillRect/>
+          </a:stretch>
+        </p:blipFill>
+        <p:spPr>
+          <a:xfrm>
+            <a:off x="667512" y="1828800"/>
+            <a:ext cx="347472" cy="347472"/>
+          </a:xfrm>
+          <a:prstGeom prst="rect">
+            <a:avLst/>
+          </a:prstGeom>
+        </p:spPr>
+      </p:pic>
+      <p:sp>
+        <p:nvSpPr>
+          <p:cNvPr id="9" name="Text 6"/>
+          <p:cNvSpPr/>
+          <p:nvPr/>
+        </p:nvSpPr>
+        <p:spPr>
+          <a:xfrm>
+            <a:off x="1106424" y="1755648"/>
+            <a:ext cx="2837688" cy="777240"/>
+          </a:xfrm>
+          <a:prstGeom prst="rect">
+            <a:avLst/>
+          </a:prstGeom>
+          <a:noFill/>
+          <a:ln/>
+        </p:spPr>
+        <p:txBody>
+          <a:bodyPr wrap="square" rtlCol="0" anchor="ctr"/>
+          <a:lstStyle/>
+          <a:p>
+            <a:pPr indent="0" marL="0">
+              <a:lnSpc>
+                <a:spcPct val="100000"/>
+              </a:lnSpc>
+              <a:buNone/>
+            </a:pPr>
+            <a:r>
+              <a:rPr lang="en-US" sz="2000" b="1" dirty="0">
+                <a:solidFill>
+                  <a:srgbClr val="002050"/>
+                </a:solidFill>
+                <a:latin typeface="Aptos Display" pitchFamily="34" charset="0"/>
+                <a:ea typeface="Aptos Display" pitchFamily="34" charset="-122"/>
+                <a:cs typeface="Aptos Display" pitchFamily="34" charset="-120"/>
+              </a:rPr>
+              <a:t>1 · Listening</a:t>
+            </a:r>
+            <a:endParaRPr lang="en-US" sz="2000" dirty="0"/>
+          </a:p>
+        </p:txBody>
+      </p:sp>
+      <p:sp>
+        <p:nvSpPr>
+          <p:cNvPr id="10" name="Text 7"/>
+          <p:cNvSpPr/>
+          <p:nvPr/>
+        </p:nvSpPr>
+        <p:spPr>
+          <a:xfrm>
+            <a:off x="667512" y="2578608"/>
+            <a:ext cx="3276600" cy="1682496"/>
+          </a:xfrm>
+          <a:prstGeom prst="rect">
+            <a:avLst/>
+          </a:prstGeom>
+          <a:noFill/>
+          <a:ln/>
+        </p:spPr>
+        <p:txBody>
+          <a:bodyPr wrap="square" rtlCol="0" anchor="t"/>
+          <a:lstStyle/>
+          <a:p>
+            <a:pPr indent="0" marL="0">
+              <a:lnSpc>
+                <a:spcPct val="110000"/>
+              </a:lnSpc>
+              <a:buNone/>
+            </a:pPr>
+            <a:r>
+              <a:rPr lang="en-US" sz="1800" dirty="0">
+                <a:solidFill>
+                  <a:srgbClr val="6B7280"/>
+                </a:solidFill>
+                <a:latin typeface="Aptos" pitchFamily="34" charset="0"/>
+                <a:ea typeface="Aptos" pitchFamily="34" charset="-122"/>
+                <a:cs typeface="Aptos" pitchFamily="34" charset="-120"/>
+              </a:rPr>
+              <a:t>Not just hearing what is said — making sure you understand it. The note taker's technical background earns its keep here.</a:t>
+            </a:r>
+            <a:endParaRPr lang="en-US" sz="1800" dirty="0"/>
+          </a:p>
+        </p:txBody>
+      </p:sp>
+      <p:sp>
+        <p:nvSpPr>
+          <p:cNvPr id="11" name="Shape 8"/>
+          <p:cNvSpPr/>
+          <p:nvPr/>
+        </p:nvSpPr>
+        <p:spPr>
+          <a:xfrm>
+            <a:off x="4291584" y="1645920"/>
+            <a:ext cx="3605784" cy="2743200"/>
+          </a:xfrm>
+          <a:prstGeom prst="roundRect">
+            <a:avLst>
+              <a:gd name="adj" fmla="val 3000"/>
+            </a:avLst>
+          </a:prstGeom>
+          <a:solidFill>
+            <a:srgbClr val="FFFFFF"/>
+          </a:solidFill>
+          <a:ln w="12700">
+            <a:solidFill>
+              <a:srgbClr val="D5E3F2"/>
+            </a:solidFill>
+            <a:prstDash val="solid"/>
+          </a:ln>
+          <a:effectLst>
+            <a:outerShdw sx="100000" sy="100000" kx="0" ky="0" algn="bl" rotWithShape="0" blurRad="88900" dist="25400" dir="5400000">
+              <a:srgbClr val="9AB4CC">
+                <a:alpha val="30000"/>
+              </a:srgbClr>
+            </a:outerShdw>
+          </a:effectLst>
+        </p:spPr>
+      </p:sp>
+      <p:pic>
+        <p:nvPicPr>
+          <p:cNvPr id="12" name="Image 1" descr="preencoded.png">    </p:cNvPr>
+          <p:cNvPicPr>
+            <a:picLocks noChangeAspect="1"/>
+          </p:cNvPicPr>
+          <p:nvPr/>
+        </p:nvPicPr>
+        <p:blipFill>
+          <a:blip r:embed="rId3">
+            <a:extLst>
+              <a:ext uri="{96DAC541-7B7A-43D3-8B79-37D633B846F1}">
+                <asvg:svgBlip xmlns:asvg="http://schemas.microsoft.com/office/drawing/2016/SVG/main" r:embed="rId4"/>
+              </a:ext>
+            </a:extLst>
+          </a:blip>
+          <a:stretch>
+            <a:fillRect/>
+          </a:stretch>
+        </p:blipFill>
+        <p:spPr>
+          <a:xfrm>
+            <a:off x="4456176" y="1828800"/>
+            <a:ext cx="347472" cy="347472"/>
+          </a:xfrm>
+          <a:prstGeom prst="rect">
+            <a:avLst/>
+          </a:prstGeom>
+        </p:spPr>
+      </p:pic>
+      <p:sp>
+        <p:nvSpPr>
+          <p:cNvPr id="13" name="Text 9"/>
+          <p:cNvSpPr/>
+          <p:nvPr/>
+        </p:nvSpPr>
+        <p:spPr>
+          <a:xfrm>
+            <a:off x="4895088" y="1755648"/>
+            <a:ext cx="2837688" cy="777240"/>
+          </a:xfrm>
+          <a:prstGeom prst="rect">
+            <a:avLst/>
+          </a:prstGeom>
+          <a:noFill/>
+          <a:ln/>
+        </p:spPr>
+        <p:txBody>
+          <a:bodyPr wrap="square" rtlCol="0" anchor="ctr"/>
+          <a:lstStyle/>
+          <a:p>
+            <a:pPr indent="0" marL="0">
+              <a:lnSpc>
+                <a:spcPct val="100000"/>
+              </a:lnSpc>
+              <a:buNone/>
+            </a:pPr>
+            <a:r>
+              <a:rPr lang="en-US" sz="2000" b="1" dirty="0">
+                <a:solidFill>
+                  <a:srgbClr val="002050"/>
+                </a:solidFill>
+                <a:latin typeface="Aptos Display" pitchFamily="34" charset="0"/>
+                <a:ea typeface="Aptos Display" pitchFamily="34" charset="-122"/>
+                <a:cs typeface="Aptos Display" pitchFamily="34" charset="-120"/>
+              </a:rPr>
+              <a:t>2 · Taking notes</a:t>
+            </a:r>
+            <a:endParaRPr lang="en-US" sz="2000" dirty="0"/>
+          </a:p>
+        </p:txBody>
+      </p:sp>
+      <p:sp>
+        <p:nvSpPr>
+          <p:cNvPr id="14" name="Text 10"/>
+          <p:cNvSpPr/>
+          <p:nvPr/>
+        </p:nvSpPr>
+        <p:spPr>
+          <a:xfrm>
+            <a:off x="4456176" y="2578608"/>
+            <a:ext cx="3276600" cy="1682496"/>
+          </a:xfrm>
+          <a:prstGeom prst="rect">
+            <a:avLst/>
+          </a:prstGeom>
+          <a:noFill/>
+          <a:ln/>
+        </p:spPr>
+        <p:txBody>
+          <a:bodyPr wrap="square" rtlCol="0" anchor="t"/>
+          <a:lstStyle/>
+          <a:p>
+            <a:pPr indent="0" marL="0">
+              <a:lnSpc>
+                <a:spcPct val="110000"/>
+              </a:lnSpc>
+              <a:buNone/>
+            </a:pPr>
+            <a:r>
+              <a:rPr lang="en-US" sz="1800" dirty="0">
+                <a:solidFill>
+                  <a:srgbClr val="6B7280"/>
+                </a:solidFill>
+                <a:latin typeface="Aptos" pitchFamily="34" charset="0"/>
+                <a:ea typeface="Aptos" pitchFamily="34" charset="-122"/>
+                <a:cs typeface="Aptos" pitchFamily="34" charset="-120"/>
+              </a:rPr>
+              <a:t>Write only the main points and the decisions, in your own words. Pay special attention to decisions — ask for them to be repeated, and stop the meeting if anything is unclear.</a:t>
+            </a:r>
+            <a:endParaRPr lang="en-US" sz="1800" dirty="0"/>
+          </a:p>
+        </p:txBody>
+      </p:sp>
+      <p:sp>
+        <p:nvSpPr>
+          <p:cNvPr id="15" name="Shape 11"/>
+          <p:cNvSpPr/>
+          <p:nvPr/>
+        </p:nvSpPr>
+        <p:spPr>
+          <a:xfrm>
+            <a:off x="8080248" y="1645920"/>
+            <a:ext cx="3605784" cy="2743200"/>
+          </a:xfrm>
+          <a:prstGeom prst="roundRect">
+            <a:avLst>
+              <a:gd name="adj" fmla="val 3000"/>
+            </a:avLst>
+          </a:prstGeom>
+          <a:solidFill>
+            <a:srgbClr val="FFFFFF"/>
+          </a:solidFill>
+          <a:ln w="12700">
+            <a:solidFill>
+              <a:srgbClr val="D5E3F2"/>
+            </a:solidFill>
+            <a:prstDash val="solid"/>
+          </a:ln>
+          <a:effectLst>
+            <a:outerShdw sx="100000" sy="100000" kx="0" ky="0" algn="bl" rotWithShape="0" blurRad="88900" dist="25400" dir="5400000">
+              <a:srgbClr val="9AB4CC">
+                <a:alpha val="30000"/>
+              </a:srgbClr>
+            </a:outerShdw>
+          </a:effectLst>
+        </p:spPr>
+      </p:sp>
+      <p:pic>
+        <p:nvPicPr>
+          <p:cNvPr id="16" name="Image 2" descr="preencoded.png">    </p:cNvPr>
+          <p:cNvPicPr>
+            <a:picLocks noChangeAspect="1"/>
+          </p:cNvPicPr>
+          <p:nvPr/>
+        </p:nvPicPr>
+        <p:blipFill>
+          <a:blip r:embed="rId5">
+            <a:extLst>
+              <a:ext uri="{96DAC541-7B7A-43D3-8B79-37D633B846F1}">
+                <asvg:svgBlip xmlns:asvg="http://schemas.microsoft.com/office/drawing/2016/SVG/main" r:embed="rId6"/>
+              </a:ext>
+            </a:extLst>
+          </a:blip>
+          <a:stretch>
+            <a:fillRect/>
+          </a:stretch>
+        </p:blipFill>
+        <p:spPr>
+          <a:xfrm>
+            <a:off x="8244840" y="1828800"/>
+            <a:ext cx="347472" cy="347472"/>
+          </a:xfrm>
+          <a:prstGeom prst="rect">
+            <a:avLst/>
+          </a:prstGeom>
+        </p:spPr>
+      </p:pic>
+      <p:sp>
+        <p:nvSpPr>
+          <p:cNvPr id="17" name="Text 12"/>
+          <p:cNvSpPr/>
+          <p:nvPr/>
+        </p:nvSpPr>
+        <p:spPr>
+          <a:xfrm>
+            <a:off x="8683752" y="1755648"/>
+            <a:ext cx="2837688" cy="777240"/>
+          </a:xfrm>
+          <a:prstGeom prst="rect">
+            <a:avLst/>
+          </a:prstGeom>
+          <a:noFill/>
+          <a:ln/>
+        </p:spPr>
+        <p:txBody>
+          <a:bodyPr wrap="square" rtlCol="0" anchor="ctr"/>
+          <a:lstStyle/>
+          <a:p>
+            <a:pPr indent="0" marL="0">
+              <a:lnSpc>
+                <a:spcPct val="100000"/>
+              </a:lnSpc>
+              <a:buNone/>
+            </a:pPr>
+            <a:r>
+              <a:rPr lang="en-US" sz="2000" b="1" dirty="0">
+                <a:solidFill>
+                  <a:srgbClr val="002050"/>
+                </a:solidFill>
+                <a:latin typeface="Aptos Display" pitchFamily="34" charset="0"/>
+                <a:ea typeface="Aptos Display" pitchFamily="34" charset="-122"/>
+                <a:cs typeface="Aptos Display" pitchFamily="34" charset="-120"/>
+              </a:rPr>
+              <a:t>3 · Writing the minutes</a:t>
+            </a:r>
+            <a:endParaRPr lang="en-US" sz="2000" dirty="0"/>
+          </a:p>
+        </p:txBody>
+      </p:sp>
+      <p:sp>
+        <p:nvSpPr>
+          <p:cNvPr id="18" name="Text 13"/>
+          <p:cNvSpPr/>
+          <p:nvPr/>
+        </p:nvSpPr>
+        <p:spPr>
+          <a:xfrm>
+            <a:off x="8244840" y="2578608"/>
+            <a:ext cx="3276600" cy="1682496"/>
+          </a:xfrm>
+          <a:prstGeom prst="rect">
+            <a:avLst/>
+          </a:prstGeom>
+          <a:noFill/>
+          <a:ln/>
+        </p:spPr>
+        <p:txBody>
+          <a:bodyPr wrap="square" rtlCol="0" anchor="t"/>
+          <a:lstStyle/>
+          <a:p>
+            <a:pPr indent="0" marL="0">
+              <a:lnSpc>
+                <a:spcPct val="110000"/>
+              </a:lnSpc>
+              <a:buNone/>
+            </a:pPr>
+            <a:r>
+              <a:rPr lang="en-US" sz="1800" dirty="0">
+                <a:solidFill>
+                  <a:srgbClr val="6B7280"/>
+                </a:solidFill>
+                <a:latin typeface="Aptos" pitchFamily="34" charset="0"/>
+                <a:ea typeface="Aptos" pitchFamily="34" charset="-122"/>
+                <a:cs typeface="Aptos" pitchFamily="34" charset="-120"/>
+              </a:rPr>
+              <a:t>Neatly, in a dedicated minute book or file — never on scraps of paper — kept safe and available for consultation at any time.</a:t>
+            </a:r>
+            <a:endParaRPr lang="en-US" sz="1800" dirty="0"/>
+          </a:p>
+        </p:txBody>
+      </p:sp>
+      <p:sp>
+        <p:nvSpPr>
+          <p:cNvPr id="19" name="Text 14"/>
+          <p:cNvSpPr/>
+          <p:nvPr/>
+        </p:nvSpPr>
+        <p:spPr>
+          <a:xfrm>
+            <a:off x="502920" y="4617720"/>
+            <a:ext cx="11183112" cy="548640"/>
+          </a:xfrm>
+          <a:prstGeom prst="rect">
+            <a:avLst/>
+          </a:prstGeom>
+          <a:noFill/>
+          <a:ln/>
+        </p:spPr>
+        <p:txBody>
+          <a:bodyPr wrap="square" rtlCol="0" anchor="ctr"/>
           <a:lstStyle/>
           <a:p>
             <a:pPr indent="0" marL="0">
@@ -2828,7 +5019,7 @@
               <a:buNone/>
             </a:pPr>
             <a:r>
-              <a:rPr lang="en-US" sz="1800" dirty="0">
+              <a:rPr lang="en-US" sz="1800" i="1" dirty="0">
                 <a:solidFill>
                   <a:srgbClr val="6B7280"/>
                 </a:solidFill>
@@ -2836,15 +5027,223 @@
                 <a:ea typeface="Aptos" pitchFamily="34" charset="-122"/>
                 <a:cs typeface="Aptos" pitchFamily="34" charset="-120"/>
               </a:rPr>
-              <a:t>Produce the minutes in the organisation's format, check them, and distribute them within the required time.</a:t>
+              <a:t>Separate fact from opinion: attribute views to their source — “Jane suggested that…”, “the group concluded that…”.</a:t>
             </a:r>
             <a:endParaRPr lang="en-US" sz="1800" dirty="0"/>
+          </a:p>
+        </p:txBody>
+      </p:sp>
+    </p:spTree>
+  </p:cSld>
+  <p:clrMapOvr>
+    <a:masterClrMapping/>
+  </p:clrMapOvr>
+</p:sld>
+</file>
+
+<file path=ppt/slides/slide5.xml><?xml version="1.0" encoding="utf-8"?>
+<p:sld xmlns:a="http://schemas.openxmlformats.org/drawingml/2006/main" xmlns:r="http://schemas.openxmlformats.org/officeDocument/2006/relationships" xmlns:p="http://schemas.openxmlformats.org/presentationml/2006/main">
+  <p:cSld name="Slide 5">
+    <p:bg>
+      <p:bgPr>
+        <a:solidFill>
+          <a:srgbClr val="FFFFFF"/>
+        </a:solidFill>
+      </p:bgPr>
+    </p:bg>
+    <p:spTree>
+      <p:nvGrpSpPr>
+        <p:cNvPr id="1" name=""/>
+        <p:cNvGrpSpPr/>
+        <p:nvPr/>
+      </p:nvGrpSpPr>
+      <p:grpSpPr>
+        <a:xfrm>
+          <a:off x="0" y="0"/>
+          <a:ext cx="0" cy="0"/>
+          <a:chOff x="0" y="0"/>
+          <a:chExt cx="0" cy="0"/>
+        </a:xfrm>
+      </p:grpSpPr>
+      <p:sp>
+        <p:nvSpPr>
+          <p:cNvPr id="2" name="Text 0"/>
+          <p:cNvSpPr/>
+          <p:nvPr/>
+        </p:nvSpPr>
+        <p:spPr>
+          <a:xfrm>
+            <a:off x="502920" y="6400800"/>
+            <a:ext cx="10268712" cy="347472"/>
+          </a:xfrm>
+          <a:prstGeom prst="rect">
+            <a:avLst/>
+          </a:prstGeom>
+          <a:noFill/>
+          <a:ln/>
+        </p:spPr>
+        <p:txBody>
+          <a:bodyPr wrap="square" rtlCol="0" anchor="ctr"/>
+          <a:lstStyle/>
+          <a:p>
+            <a:pPr indent="0" marL="0">
+              <a:buNone/>
+            </a:pPr>
+            <a:r>
+              <a:rPr lang="en-US" sz="1800" dirty="0">
+                <a:solidFill>
+                  <a:srgbClr val="6B7280"/>
+                </a:solidFill>
+                <a:latin typeface="Aptos" pitchFamily="34" charset="0"/>
+                <a:ea typeface="Aptos" pitchFamily="34" charset="-122"/>
+                <a:cs typeface="Aptos" pitchFamily="34" charset="-120"/>
+              </a:rPr>
+              <a:t>US 114051 · Conduct a technical practitioners meeting · NQF 5 · 4 credits</a:t>
+            </a:r>
+            <a:endParaRPr lang="en-US" sz="1800" dirty="0"/>
+          </a:p>
+        </p:txBody>
+      </p:sp>
+      <p:sp>
+        <p:nvSpPr>
+          <p:cNvPr id="3" name="Text 1"/>
+          <p:cNvSpPr/>
+          <p:nvPr/>
+        </p:nvSpPr>
+        <p:spPr>
+          <a:xfrm>
+            <a:off x="11045952" y="6400800"/>
+            <a:ext cx="640080" cy="347472"/>
+          </a:xfrm>
+          <a:prstGeom prst="rect">
+            <a:avLst/>
+          </a:prstGeom>
+          <a:noFill/>
+          <a:ln/>
+        </p:spPr>
+        <p:txBody>
+          <a:bodyPr wrap="square" rtlCol="0" anchor="ctr"/>
+          <a:lstStyle/>
+          <a:p>
+            <a:pPr algn="r" indent="0" marL="0">
+              <a:buNone/>
+            </a:pPr>
+            <a:r>
+              <a:rPr lang="en-US" sz="1800" dirty="0">
+                <a:solidFill>
+                  <a:srgbClr val="6B7280"/>
+                </a:solidFill>
+                <a:latin typeface="Aptos" pitchFamily="34" charset="0"/>
+                <a:ea typeface="Aptos" pitchFamily="34" charset="-122"/>
+                <a:cs typeface="Aptos" pitchFamily="34" charset="-120"/>
+              </a:rPr>
+              <a:t>5</a:t>
+            </a:r>
+            <a:endParaRPr lang="en-US" sz="1800" dirty="0"/>
+          </a:p>
+        </p:txBody>
+      </p:sp>
+      <p:sp>
+        <p:nvSpPr>
+          <p:cNvPr id="4" name="Shape 2"/>
+          <p:cNvSpPr/>
+          <p:nvPr/>
+        </p:nvSpPr>
+        <p:spPr>
+          <a:xfrm>
+            <a:off x="0" y="0"/>
+            <a:ext cx="12188952" cy="82296"/>
+          </a:xfrm>
+          <a:prstGeom prst="rect">
+            <a:avLst/>
+          </a:prstGeom>
+          <a:solidFill>
+            <a:srgbClr val="0F6CBD"/>
+          </a:solidFill>
+          <a:ln/>
+        </p:spPr>
+      </p:sp>
+      <p:sp>
+        <p:nvSpPr>
+          <p:cNvPr id="5" name="Text 3"/>
+          <p:cNvSpPr/>
+          <p:nvPr/>
+        </p:nvSpPr>
+        <p:spPr>
+          <a:xfrm>
+            <a:off x="502920" y="237744"/>
+            <a:ext cx="11183112" cy="347472"/>
+          </a:xfrm>
+          <a:prstGeom prst="rect">
+            <a:avLst/>
+          </a:prstGeom>
+          <a:noFill/>
+          <a:ln/>
+        </p:spPr>
+        <p:txBody>
+          <a:bodyPr wrap="square" rtlCol="0" anchor="ctr"/>
+          <a:lstStyle/>
+          <a:p>
+            <a:pPr indent="0" marL="0">
+              <a:buNone/>
+            </a:pPr>
+            <a:r>
+              <a:rPr lang="en-US" sz="1800" b="1" spc="200" kern="0" dirty="0">
+                <a:solidFill>
+                  <a:srgbClr val="0F6CBD"/>
+                </a:solidFill>
+                <a:latin typeface="Aptos" pitchFamily="34" charset="0"/>
+                <a:ea typeface="Aptos" pitchFamily="34" charset="-122"/>
+                <a:cs typeface="Aptos" pitchFamily="34" charset="-120"/>
+              </a:rPr>
+              <a:t>POST-MEETING FOLLOW-UP</a:t>
+            </a:r>
+            <a:endParaRPr lang="en-US" sz="1800" dirty="0"/>
+          </a:p>
+        </p:txBody>
+      </p:sp>
+      <p:sp>
+        <p:nvSpPr>
+          <p:cNvPr id="6" name="Text 4"/>
+          <p:cNvSpPr/>
+          <p:nvPr/>
+        </p:nvSpPr>
+        <p:spPr>
+          <a:xfrm>
+            <a:off x="502920" y="585216"/>
+            <a:ext cx="11183112" cy="603504"/>
+          </a:xfrm>
+          <a:prstGeom prst="rect">
+            <a:avLst/>
+          </a:prstGeom>
+          <a:noFill/>
+          <a:ln/>
+        </p:spPr>
+        <p:txBody>
+          <a:bodyPr wrap="square" rtlCol="0" anchor="ctr"/>
+          <a:lstStyle/>
+          <a:p>
+            <a:pPr indent="0" marL="0">
+              <a:buNone/>
+            </a:pPr>
+            <a:r>
+              <a:rPr lang="en-US" sz="3000" b="1" dirty="0">
+                <a:solidFill>
+                  <a:srgbClr val="002050"/>
+                </a:solidFill>
+                <a:latin typeface="Aptos Display" pitchFamily="34" charset="0"/>
+                <a:ea typeface="Aptos Display" pitchFamily="34" charset="-122"/>
+                <a:cs typeface="Aptos Display" pitchFamily="34" charset="-120"/>
+              </a:rPr>
+              <a:t>What the minutes must contain</a:t>
+            </a:r>
+            <a:endParaRPr lang="en-US" sz="3000" dirty="0"/>
           </a:p>
         </p:txBody>
       </p:sp>
       <p:graphicFrame>
         <p:nvGraphicFramePr>
-          <p:cNvPr id="4" name="Table 0"/>
+          <p:cNvPr id="6" name="Table 0"/>
           <p:cNvGraphicFramePr>
             <a:graphicFrameLocks noGrp="1"/>
           </p:cNvGraphicFramePr>
@@ -2857,7 +5256,7 @@
           </p:nvPr>
         </p:nvGraphicFramePr>
         <p:xfrm>
-          <a:off x="502920" y="1920240"/>
+          <a:off x="502920" y="1645920"/>
           <a:ext cx="11183112" cy="914400"/>
         </p:xfrm>
         <a:graphic>
@@ -2868,7 +5267,7 @@
                 <a:gridCol w="3291840"/>
                 <a:gridCol w="7891272"/>
               </a:tblGrid>
-              <a:tr h="548640">
+              <a:tr h="502920">
                 <a:tc>
                   <a:txBody>
                     <a:bodyPr/>
@@ -3006,7 +5405,7 @@
                   </a:tcPr>
                 </a:tc>
               </a:tr>
-              <a:tr h="548640">
+              <a:tr h="502920">
                 <a:tc>
                   <a:txBody>
                     <a:bodyPr/>
@@ -3092,7 +5491,7 @@
                           <a:ea typeface="Aptos" pitchFamily="34" charset="-122"/>
                           <a:cs typeface="Aptos" pitchFamily="34" charset="-120"/>
                         </a:rPr>
-                        <a:t>Meeting name, date, time, venue and the chairperson</a:t>
+                        <a:t>Nature of the meeting, date, time and place — and who took the minutes</a:t>
                       </a:r>
                       <a:endParaRPr lang="en-US" sz="1800" dirty="0">
                         <a:latin typeface="Aptos" charset="0"/>
@@ -3144,7 +5543,7 @@
                   </a:tcPr>
                 </a:tc>
               </a:tr>
-              <a:tr h="548640">
+              <a:tr h="502920">
                 <a:tc>
                   <a:txBody>
                     <a:bodyPr/>
@@ -3230,7 +5629,7 @@
                           <a:ea typeface="Aptos" pitchFamily="34" charset="-122"/>
                           <a:cs typeface="Aptos" pitchFamily="34" charset="-120"/>
                         </a:rPr>
-                        <a:t>Members present, apologies and absentees</a:t>
+                        <a:t>Everyone present, visitors, apologies and absentees; time the meeting was called to order</a:t>
                       </a:r>
                       <a:endParaRPr lang="en-US" sz="1800" dirty="0">
                         <a:latin typeface="Aptos" charset="0"/>
@@ -3282,7 +5681,7 @@
                   </a:tcPr>
                 </a:tc>
               </a:tr>
-              <a:tr h="548640">
+              <a:tr h="502920">
                 <a:tc>
                   <a:txBody>
                     <a:bodyPr/>
@@ -3300,7 +5699,7 @@
                           <a:ea typeface="Aptos" pitchFamily="34" charset="-122"/>
                           <a:cs typeface="Aptos" pitchFamily="34" charset="-120"/>
                         </a:rPr>
-                        <a:t>Agenda items</a:t>
+                        <a:t>Previous minutes</a:t>
                       </a:r>
                       <a:endParaRPr lang="en-US" sz="1800" dirty="0">
                         <a:latin typeface="Aptos" charset="0"/>
@@ -3368,7 +5767,7 @@
                           <a:ea typeface="Aptos" pitchFamily="34" charset="-122"/>
                           <a:cs typeface="Aptos" pitchFamily="34" charset="-120"/>
                         </a:rPr>
-                        <a:t>Each topic with a concise, accurate record of the discussion</a:t>
+                        <a:t>Approval of the previous meeting's minutes, with any corrections or amendments</a:t>
                       </a:r>
                       <a:endParaRPr lang="en-US" sz="1800" dirty="0">
                         <a:latin typeface="Aptos" charset="0"/>
@@ -3420,7 +5819,7 @@
                   </a:tcPr>
                 </a:tc>
               </a:tr>
-              <a:tr h="548640">
+              <a:tr h="502920">
                 <a:tc>
                   <a:txBody>
                     <a:bodyPr/>
@@ -3438,7 +5837,7 @@
                           <a:ea typeface="Aptos" pitchFamily="34" charset="-122"/>
                           <a:cs typeface="Aptos" pitchFamily="34" charset="-120"/>
                         </a:rPr>
-                        <a:t>Decisions</a:t>
+                        <a:t>Reports</a:t>
                       </a:r>
                       <a:endParaRPr lang="en-US" sz="1800" dirty="0">
                         <a:latin typeface="Aptos" charset="0"/>
@@ -3506,7 +5905,7 @@
                           <a:ea typeface="Aptos" pitchFamily="34" charset="-122"/>
                           <a:cs typeface="Aptos" pitchFamily="34" charset="-120"/>
                         </a:rPr>
-                        <a:t>What was decided — clear, accurate and within the meeting's mandate</a:t>
+                        <a:t>Summary of reports, announcements and other information shared</a:t>
                       </a:r>
                       <a:endParaRPr lang="en-US" sz="1800" dirty="0">
                         <a:latin typeface="Aptos" charset="0"/>
@@ -3558,7 +5957,7 @@
                   </a:tcPr>
                 </a:tc>
               </a:tr>
-              <a:tr h="548640">
+              <a:tr h="502920">
                 <a:tc>
                   <a:txBody>
                     <a:bodyPr/>
@@ -3576,7 +5975,7 @@
                           <a:ea typeface="Aptos" pitchFamily="34" charset="-122"/>
                           <a:cs typeface="Aptos" pitchFamily="34" charset="-120"/>
                         </a:rPr>
-                        <a:t>Actions</a:t>
+                        <a:t>Motions &amp; resolutions</a:t>
                       </a:r>
                       <a:endParaRPr lang="en-US" sz="1800" dirty="0">
                         <a:latin typeface="Aptos" charset="0"/>
@@ -3644,7 +6043,7 @@
                           <a:ea typeface="Aptos" pitchFamily="34" charset="-122"/>
                           <a:cs typeface="Aptos" pitchFamily="34" charset="-120"/>
                         </a:rPr>
-                        <a:t>Each action with its responsible person and deadline</a:t>
+                        <a:t>Recorded verbatim with mover and seconder, and read back in the meeting to confirm accuracy</a:t>
                       </a:r>
                       <a:endParaRPr lang="en-US" sz="1800" dirty="0">
                         <a:latin typeface="Aptos" charset="0"/>
@@ -3696,7 +6095,7 @@
                   </a:tcPr>
                 </a:tc>
               </a:tr>
-              <a:tr h="548640">
+              <a:tr h="502920">
                 <a:tc>
                   <a:txBody>
                     <a:bodyPr/>
@@ -3714,7 +6113,7 @@
                           <a:ea typeface="Aptos" pitchFamily="34" charset="-122"/>
                           <a:cs typeface="Aptos" pitchFamily="34" charset="-120"/>
                         </a:rPr>
-                        <a:t>Next meeting</a:t>
+                        <a:t>Decisions &amp; actions</a:t>
                       </a:r>
                       <a:endParaRPr lang="en-US" sz="1800" dirty="0">
                         <a:latin typeface="Aptos" charset="0"/>
@@ -3782,7 +6181,7 @@
                           <a:ea typeface="Aptos" pitchFamily="34" charset="-122"/>
                           <a:cs typeface="Aptos" pitchFamily="34" charset="-120"/>
                         </a:rPr>
-                        <a:t>Carried-over items, date and venue</a:t>
+                        <a:t>Key points of each discussion, decisions reached, who took each assignment and its deadline</a:t>
                       </a:r>
                       <a:endParaRPr lang="en-US" sz="1800" dirty="0">
                         <a:latin typeface="Aptos" charset="0"/>
@@ -3834,6 +6233,144 @@
                   </a:tcPr>
                 </a:tc>
               </a:tr>
+              <a:tr h="502920">
+                <a:tc>
+                  <a:txBody>
+                    <a:bodyPr/>
+                    <a:lstStyle/>
+                    <a:p>
+                      <a:pPr indent="0" marL="0">
+                        <a:buNone/>
+                      </a:pPr>
+                      <a:r>
+                        <a:rPr lang="en-US" sz="1800" dirty="0">
+                          <a:solidFill>
+                            <a:srgbClr val="002050"/>
+                          </a:solidFill>
+                          <a:latin typeface="Aptos" pitchFamily="34" charset="0"/>
+                          <a:ea typeface="Aptos" pitchFamily="34" charset="-122"/>
+                          <a:cs typeface="Aptos" pitchFamily="34" charset="-120"/>
+                        </a:rPr>
+                        <a:t>Closure</a:t>
+                      </a:r>
+                      <a:endParaRPr lang="en-US" sz="1800" dirty="0">
+                        <a:latin typeface="Aptos" charset="0"/>
+                        <a:ea typeface="Aptos" charset="0"/>
+                        <a:cs typeface="Aptos" charset="0"/>
+                      </a:endParaRPr>
+                    </a:p>
+                  </a:txBody>
+                  <a:tcPr marL="82296" marR="82296" marT="82296" marB="82296" anchor="ctr">
+                    <a:lnL w="9525" cap="flat" cmpd="sng" algn="ctr">
+                      <a:solidFill>
+                        <a:srgbClr val="D5E3F2"/>
+                      </a:solidFill>
+                      <a:prstDash val="solid"/>
+                      <a:round/>
+                      <a:headEnd type="none" w="med" len="med"/>
+                      <a:tailEnd type="none" w="med" len="med"/>
+                    </a:lnL>
+                    <a:lnR w="9525" cap="flat" cmpd="sng" algn="ctr">
+                      <a:solidFill>
+                        <a:srgbClr val="D5E3F2"/>
+                      </a:solidFill>
+                      <a:prstDash val="solid"/>
+                      <a:round/>
+                      <a:headEnd type="none" w="med" len="med"/>
+                      <a:tailEnd type="none" w="med" len="med"/>
+                    </a:lnR>
+                    <a:lnT w="9525" cap="flat" cmpd="sng" algn="ctr">
+                      <a:solidFill>
+                        <a:srgbClr val="D5E3F2"/>
+                      </a:solidFill>
+                      <a:prstDash val="solid"/>
+                      <a:round/>
+                      <a:headEnd type="none" w="med" len="med"/>
+                      <a:tailEnd type="none" w="med" len="med"/>
+                    </a:lnT>
+                    <a:lnB w="9525" cap="flat" cmpd="sng" algn="ctr">
+                      <a:solidFill>
+                        <a:srgbClr val="D5E3F2"/>
+                      </a:solidFill>
+                      <a:prstDash val="solid"/>
+                      <a:round/>
+                      <a:headEnd type="none" w="med" len="med"/>
+                      <a:tailEnd type="none" w="med" len="med"/>
+                    </a:lnB>
+                    <a:solidFill>
+                      <a:srgbClr val="FFFFFF"/>
+                    </a:solidFill>
+                  </a:tcPr>
+                </a:tc>
+                <a:tc>
+                  <a:txBody>
+                    <a:bodyPr/>
+                    <a:lstStyle/>
+                    <a:p>
+                      <a:pPr indent="0" marL="0">
+                        <a:buNone/>
+                      </a:pPr>
+                      <a:r>
+                        <a:rPr lang="en-US" sz="1800" dirty="0">
+                          <a:solidFill>
+                            <a:srgbClr val="002050"/>
+                          </a:solidFill>
+                          <a:latin typeface="Aptos" pitchFamily="34" charset="0"/>
+                          <a:ea typeface="Aptos" pitchFamily="34" charset="-122"/>
+                          <a:cs typeface="Aptos" pitchFamily="34" charset="-120"/>
+                        </a:rPr>
+                        <a:t>Time of adjournment — and the next meeting's date, time and location</a:t>
+                      </a:r>
+                      <a:endParaRPr lang="en-US" sz="1800" dirty="0">
+                        <a:latin typeface="Aptos" charset="0"/>
+                        <a:ea typeface="Aptos" charset="0"/>
+                        <a:cs typeface="Aptos" charset="0"/>
+                      </a:endParaRPr>
+                    </a:p>
+                  </a:txBody>
+                  <a:tcPr marL="82296" marR="82296" marT="82296" marB="82296" anchor="ctr">
+                    <a:lnL w="9525" cap="flat" cmpd="sng" algn="ctr">
+                      <a:solidFill>
+                        <a:srgbClr val="D5E3F2"/>
+                      </a:solidFill>
+                      <a:prstDash val="solid"/>
+                      <a:round/>
+                      <a:headEnd type="none" w="med" len="med"/>
+                      <a:tailEnd type="none" w="med" len="med"/>
+                    </a:lnL>
+                    <a:lnR w="9525" cap="flat" cmpd="sng" algn="ctr">
+                      <a:solidFill>
+                        <a:srgbClr val="D5E3F2"/>
+                      </a:solidFill>
+                      <a:prstDash val="solid"/>
+                      <a:round/>
+                      <a:headEnd type="none" w="med" len="med"/>
+                      <a:tailEnd type="none" w="med" len="med"/>
+                    </a:lnR>
+                    <a:lnT w="9525" cap="flat" cmpd="sng" algn="ctr">
+                      <a:solidFill>
+                        <a:srgbClr val="D5E3F2"/>
+                      </a:solidFill>
+                      <a:prstDash val="solid"/>
+                      <a:round/>
+                      <a:headEnd type="none" w="med" len="med"/>
+                      <a:tailEnd type="none" w="med" len="med"/>
+                    </a:lnT>
+                    <a:lnB w="9525" cap="flat" cmpd="sng" algn="ctr">
+                      <a:solidFill>
+                        <a:srgbClr val="D5E3F2"/>
+                      </a:solidFill>
+                      <a:prstDash val="solid"/>
+                      <a:round/>
+                      <a:headEnd type="none" w="med" len="med"/>
+                      <a:tailEnd type="none" w="med" len="med"/>
+                    </a:lnB>
+                    <a:solidFill>
+                      <a:srgbClr val="FFFFFF"/>
+                    </a:solidFill>
+                  </a:tcPr>
+                </a:tc>
+              </a:tr>
             </a:tbl>
           </a:graphicData>
         </a:graphic>
@@ -3846,9 +6383,9 @@
 </p:sld>
 </file>
 
-<file path=ppt/slides/slide4.xml><?xml version="1.0" encoding="utf-8"?>
+<file path=ppt/slides/slide6.xml><?xml version="1.0" encoding="utf-8"?>
 <p:sld xmlns:a="http://schemas.openxmlformats.org/drawingml/2006/main" xmlns:r="http://schemas.openxmlformats.org/officeDocument/2006/relationships" xmlns:p="http://schemas.openxmlformats.org/presentationml/2006/main">
-  <p:cSld name="Slide 4">
+  <p:cSld name="Slide 6">
     <p:bg>
       <p:bgPr>
         <a:solidFill>
@@ -3942,7 +6479,7 @@
                 <a:ea typeface="Aptos" pitchFamily="34" charset="-122"/>
                 <a:cs typeface="Aptos" pitchFamily="34" charset="-120"/>
               </a:rPr>
-              <a:t>4</a:t>
+              <a:t>6</a:t>
             </a:r>
             <a:endParaRPr lang="en-US" sz="1800" dirty="0"/>
           </a:p>
@@ -4040,7 +6577,7 @@
                 <a:ea typeface="Aptos Display" pitchFamily="34" charset="-122"/>
                 <a:cs typeface="Aptos Display" pitchFamily="34" charset="-120"/>
               </a:rPr>
-              <a:t>Communicate decisions and track actions</a:t>
+              <a:t>After the meeting — close the loop</a:t>
             </a:r>
             <a:endParaRPr lang="en-US" sz="3000" dirty="0"/>
           </a:p>
@@ -4048,485 +6585,141 @@
       </p:sp>
       <p:sp>
         <p:nvSpPr>
-          <p:cNvPr id="7" name="Shape 5"/>
-          <p:cNvSpPr/>
-          <p:nvPr/>
-        </p:nvSpPr>
-        <p:spPr>
-          <a:xfrm>
-            <a:off x="502920" y="1645920"/>
-            <a:ext cx="3605784" cy="2743200"/>
-          </a:xfrm>
-          <a:prstGeom prst="roundRect">
-            <a:avLst>
-              <a:gd name="adj" fmla="val 3000"/>
-            </a:avLst>
-          </a:prstGeom>
-          <a:solidFill>
-            <a:srgbClr val="FFFFFF"/>
-          </a:solidFill>
-          <a:ln w="12700">
-            <a:solidFill>
-              <a:srgbClr val="D5E3F2"/>
-            </a:solidFill>
-            <a:prstDash val="solid"/>
-          </a:ln>
-          <a:effectLst>
-            <a:outerShdw sx="100000" sy="100000" kx="0" ky="0" algn="bl" rotWithShape="0" blurRad="88900" dist="25400" dir="5400000">
-              <a:srgbClr val="9AB4CC">
-                <a:alpha val="30000"/>
-              </a:srgbClr>
-            </a:outerShdw>
-          </a:effectLst>
-        </p:spPr>
-      </p:sp>
-      <p:pic>
-        <p:nvPicPr>
-          <p:cNvPr id="8" name="Image 0" descr="preencoded.png">    </p:cNvPr>
-          <p:cNvPicPr>
-            <a:picLocks noChangeAspect="1"/>
-          </p:cNvPicPr>
-          <p:nvPr/>
-        </p:nvPicPr>
-        <p:blipFill>
-          <a:blip r:embed="rId1">
-            <a:extLst>
-              <a:ext uri="{96DAC541-7B7A-43D3-8B79-37D633B846F1}">
-                <asvg:svgBlip xmlns:asvg="http://schemas.microsoft.com/office/drawing/2016/SVG/main" r:embed="rId2"/>
-              </a:ext>
-            </a:extLst>
-          </a:blip>
-          <a:stretch>
-            <a:fillRect/>
-          </a:stretch>
-        </p:blipFill>
-        <p:spPr>
-          <a:xfrm>
-            <a:off x="667512" y="1828800"/>
-            <a:ext cx="347472" cy="347472"/>
-          </a:xfrm>
-          <a:prstGeom prst="rect">
-            <a:avLst/>
-          </a:prstGeom>
-        </p:spPr>
-      </p:pic>
-      <p:sp>
-        <p:nvSpPr>
-          <p:cNvPr id="9" name="Text 6"/>
-          <p:cNvSpPr/>
-          <p:nvPr/>
-        </p:nvSpPr>
-        <p:spPr>
-          <a:xfrm>
-            <a:off x="1106424" y="1755648"/>
-            <a:ext cx="2837688" cy="777240"/>
-          </a:xfrm>
-          <a:prstGeom prst="rect">
-            <a:avLst/>
-          </a:prstGeom>
-          <a:noFill/>
-          <a:ln/>
-        </p:spPr>
-        <p:txBody>
-          <a:bodyPr wrap="square" rtlCol="0" anchor="ctr"/>
-          <a:lstStyle/>
-          <a:p>
-            <a:pPr indent="0" marL="0">
+          <p:cNvPr id="7" name="Text 5"/>
+          <p:cNvSpPr/>
+          <p:nvPr/>
+        </p:nvSpPr>
+        <p:spPr>
+          <a:xfrm>
+            <a:off x="502920" y="1554480"/>
+            <a:ext cx="11183112" cy="4572000"/>
+          </a:xfrm>
+          <a:prstGeom prst="rect">
+            <a:avLst/>
+          </a:prstGeom>
+          <a:noFill/>
+          <a:ln/>
+        </p:spPr>
+        <p:txBody>
+          <a:bodyPr wrap="square" rtlCol="0" anchor="t"/>
+          <a:lstStyle/>
+          <a:p>
+            <a:pPr marL="203200" indent="-203200">
               <a:lnSpc>
-                <a:spcPct val="100000"/>
+                <a:spcPct val="120000"/>
               </a:lnSpc>
-              <a:buNone/>
-            </a:pPr>
-            <a:r>
-              <a:rPr lang="en-US" sz="2000" b="1" dirty="0">
+              <a:spcAft>
+                <a:spcPts val="1000"/>
+              </a:spcAft>
+              <a:buSzPct val="100000"/>
+              <a:buChar char="•"/>
+            </a:pPr>
+            <a:r>
+              <a:rPr lang="en-US" sz="1800" dirty="0">
                 <a:solidFill>
                   <a:srgbClr val="002050"/>
-                </a:solidFill>
-                <a:latin typeface="Aptos Display" pitchFamily="34" charset="0"/>
-                <a:ea typeface="Aptos Display" pitchFamily="34" charset="-122"/>
-                <a:cs typeface="Aptos Display" pitchFamily="34" charset="-120"/>
-              </a:rPr>
-              <a:t>Communicate decisions</a:t>
-            </a:r>
-            <a:endParaRPr lang="en-US" sz="2000" dirty="0"/>
-          </a:p>
-        </p:txBody>
-      </p:sp>
-      <p:sp>
-        <p:nvSpPr>
-          <p:cNvPr id="10" name="Text 7"/>
-          <p:cNvSpPr/>
-          <p:nvPr/>
-        </p:nvSpPr>
-        <p:spPr>
-          <a:xfrm>
-            <a:off x="667512" y="2578608"/>
-            <a:ext cx="3276600" cy="1682496"/>
-          </a:xfrm>
-          <a:prstGeom prst="rect">
-            <a:avLst/>
-          </a:prstGeom>
-          <a:noFill/>
-          <a:ln/>
-        </p:spPr>
-        <p:txBody>
-          <a:bodyPr wrap="square" rtlCol="0" anchor="t"/>
-          <a:lstStyle/>
-          <a:p>
-            <a:pPr indent="0" marL="0">
-              <a:lnSpc>
-                <a:spcPct val="110000"/>
-              </a:lnSpc>
-              <a:buNone/>
-            </a:pPr>
-            <a:r>
-              <a:rPr lang="en-US" sz="1800" dirty="0">
-                <a:solidFill>
-                  <a:srgbClr val="6B7280"/>
                 </a:solidFill>
                 <a:latin typeface="Aptos" pitchFamily="34" charset="0"/>
                 <a:ea typeface="Aptos" pitchFamily="34" charset="-122"/>
                 <a:cs typeface="Aptos" pitchFamily="34" charset="-120"/>
               </a:rPr>
-              <a:t>To all affected stakeholders, in the required format — minutes, e-mail or report — and within the required timeframe.</a:t>
+              <a:t>Write up, organise and distribute the minutes to everyone who attended within a reasonable time — distributing them before the next meeting reminds people of assignments and deadlines.</a:t>
             </a:r>
             <a:endParaRPr lang="en-US" sz="1800" dirty="0"/>
           </a:p>
-        </p:txBody>
-      </p:sp>
-      <p:sp>
-        <p:nvSpPr>
-          <p:cNvPr id="11" name="Shape 8"/>
-          <p:cNvSpPr/>
-          <p:nvPr/>
-        </p:nvSpPr>
-        <p:spPr>
-          <a:xfrm>
-            <a:off x="4291584" y="1645920"/>
-            <a:ext cx="3605784" cy="2743200"/>
-          </a:xfrm>
-          <a:prstGeom prst="roundRect">
-            <a:avLst>
-              <a:gd name="adj" fmla="val 3000"/>
-            </a:avLst>
-          </a:prstGeom>
-          <a:solidFill>
-            <a:srgbClr val="FFFFFF"/>
-          </a:solidFill>
-          <a:ln w="12700">
-            <a:solidFill>
-              <a:srgbClr val="D5E3F2"/>
-            </a:solidFill>
-            <a:prstDash val="solid"/>
-          </a:ln>
-          <a:effectLst>
-            <a:outerShdw sx="100000" sy="100000" kx="0" ky="0" algn="bl" rotWithShape="0" blurRad="88900" dist="25400" dir="5400000">
-              <a:srgbClr val="9AB4CC">
-                <a:alpha val="30000"/>
-              </a:srgbClr>
-            </a:outerShdw>
-          </a:effectLst>
-        </p:spPr>
-      </p:sp>
-      <p:pic>
-        <p:nvPicPr>
-          <p:cNvPr id="12" name="Image 1" descr="preencoded.png">    </p:cNvPr>
-          <p:cNvPicPr>
-            <a:picLocks noChangeAspect="1"/>
-          </p:cNvPicPr>
-          <p:nvPr/>
-        </p:nvPicPr>
-        <p:blipFill>
-          <a:blip r:embed="rId3">
-            <a:extLst>
-              <a:ext uri="{96DAC541-7B7A-43D3-8B79-37D633B846F1}">
-                <asvg:svgBlip xmlns:asvg="http://schemas.microsoft.com/office/drawing/2016/SVG/main" r:embed="rId4"/>
-              </a:ext>
-            </a:extLst>
-          </a:blip>
-          <a:stretch>
-            <a:fillRect/>
-          </a:stretch>
-        </p:blipFill>
-        <p:spPr>
-          <a:xfrm>
-            <a:off x="4456176" y="1828800"/>
-            <a:ext cx="347472" cy="347472"/>
-          </a:xfrm>
-          <a:prstGeom prst="rect">
-            <a:avLst/>
-          </a:prstGeom>
-        </p:spPr>
-      </p:pic>
-      <p:sp>
-        <p:nvSpPr>
-          <p:cNvPr id="13" name="Text 9"/>
-          <p:cNvSpPr/>
-          <p:nvPr/>
-        </p:nvSpPr>
-        <p:spPr>
-          <a:xfrm>
-            <a:off x="4895088" y="1755648"/>
-            <a:ext cx="2837688" cy="777240"/>
-          </a:xfrm>
-          <a:prstGeom prst="rect">
-            <a:avLst/>
-          </a:prstGeom>
-          <a:noFill/>
-          <a:ln/>
-        </p:spPr>
-        <p:txBody>
-          <a:bodyPr wrap="square" rtlCol="0" anchor="ctr"/>
-          <a:lstStyle/>
-          <a:p>
-            <a:pPr indent="0" marL="0">
+          <a:p>
+            <a:pPr marL="203200" indent="-203200">
               <a:lnSpc>
-                <a:spcPct val="100000"/>
+                <a:spcPct val="120000"/>
               </a:lnSpc>
-              <a:buNone/>
-            </a:pPr>
-            <a:r>
-              <a:rPr lang="en-US" sz="2000" b="1" dirty="0">
+              <a:spcAft>
+                <a:spcPts val="1000"/>
+              </a:spcAft>
+              <a:buSzPct val="100000"/>
+              <a:buChar char="•"/>
+            </a:pPr>
+            <a:r>
+              <a:rPr lang="en-US" sz="1800" dirty="0">
                 <a:solidFill>
                   <a:srgbClr val="002050"/>
-                </a:solidFill>
-                <a:latin typeface="Aptos Display" pitchFamily="34" charset="0"/>
-                <a:ea typeface="Aptos Display" pitchFamily="34" charset="-122"/>
-                <a:cs typeface="Aptos Display" pitchFamily="34" charset="-120"/>
-              </a:rPr>
-              <a:t>Summarise actions</a:t>
-            </a:r>
-            <a:endParaRPr lang="en-US" sz="2000" dirty="0"/>
-          </a:p>
-        </p:txBody>
-      </p:sp>
-      <p:sp>
-        <p:nvSpPr>
-          <p:cNvPr id="14" name="Text 10"/>
-          <p:cNvSpPr/>
-          <p:nvPr/>
-        </p:nvSpPr>
-        <p:spPr>
-          <a:xfrm>
-            <a:off x="4456176" y="2578608"/>
-            <a:ext cx="3276600" cy="1682496"/>
-          </a:xfrm>
-          <a:prstGeom prst="rect">
-            <a:avLst/>
-          </a:prstGeom>
-          <a:noFill/>
-          <a:ln/>
-        </p:spPr>
-        <p:txBody>
-          <a:bodyPr wrap="square" rtlCol="0" anchor="t"/>
-          <a:lstStyle/>
-          <a:p>
-            <a:pPr indent="0" marL="0">
-              <a:lnSpc>
-                <a:spcPct val="110000"/>
-              </a:lnSpc>
-              <a:buNone/>
-            </a:pPr>
-            <a:r>
-              <a:rPr lang="en-US" sz="1800" dirty="0">
-                <a:solidFill>
-                  <a:srgbClr val="6B7280"/>
                 </a:solidFill>
                 <a:latin typeface="Aptos" pitchFamily="34" charset="0"/>
                 <a:ea typeface="Aptos" pitchFamily="34" charset="-122"/>
                 <a:cs typeface="Aptos" pitchFamily="34" charset="-120"/>
               </a:rPr>
-              <a:t>Each action with its owner and deadline; unresolved items carried over to the next agenda.</a:t>
+              <a:t>Communicate the agreed records of discussion to interested parties in the format and time frame required — contractual, technical review or project specific.</a:t>
             </a:r>
             <a:endParaRPr lang="en-US" sz="1800" dirty="0"/>
           </a:p>
-        </p:txBody>
-      </p:sp>
-      <p:sp>
-        <p:nvSpPr>
-          <p:cNvPr id="15" name="Shape 11"/>
-          <p:cNvSpPr/>
-          <p:nvPr/>
-        </p:nvSpPr>
-        <p:spPr>
-          <a:xfrm>
-            <a:off x="8080248" y="1645920"/>
-            <a:ext cx="3605784" cy="2743200"/>
-          </a:xfrm>
-          <a:prstGeom prst="roundRect">
-            <a:avLst>
-              <a:gd name="adj" fmla="val 3000"/>
-            </a:avLst>
-          </a:prstGeom>
-          <a:solidFill>
-            <a:srgbClr val="FFFFFF"/>
-          </a:solidFill>
-          <a:ln w="12700">
-            <a:solidFill>
-              <a:srgbClr val="D5E3F2"/>
-            </a:solidFill>
-            <a:prstDash val="solid"/>
-          </a:ln>
-          <a:effectLst>
-            <a:outerShdw sx="100000" sy="100000" kx="0" ky="0" algn="bl" rotWithShape="0" blurRad="88900" dist="25400" dir="5400000">
-              <a:srgbClr val="9AB4CC">
-                <a:alpha val="30000"/>
-              </a:srgbClr>
-            </a:outerShdw>
-          </a:effectLst>
-        </p:spPr>
-      </p:sp>
-      <p:pic>
-        <p:nvPicPr>
-          <p:cNvPr id="16" name="Image 2" descr="preencoded.png">    </p:cNvPr>
-          <p:cNvPicPr>
-            <a:picLocks noChangeAspect="1"/>
-          </p:cNvPicPr>
-          <p:nvPr/>
-        </p:nvPicPr>
-        <p:blipFill>
-          <a:blip r:embed="rId5">
-            <a:extLst>
-              <a:ext uri="{96DAC541-7B7A-43D3-8B79-37D633B846F1}">
-                <asvg:svgBlip xmlns:asvg="http://schemas.microsoft.com/office/drawing/2016/SVG/main" r:embed="rId6"/>
-              </a:ext>
-            </a:extLst>
-          </a:blip>
-          <a:stretch>
-            <a:fillRect/>
-          </a:stretch>
-        </p:blipFill>
-        <p:spPr>
-          <a:xfrm>
-            <a:off x="8244840" y="1828800"/>
-            <a:ext cx="347472" cy="347472"/>
-          </a:xfrm>
-          <a:prstGeom prst="rect">
-            <a:avLst/>
-          </a:prstGeom>
-        </p:spPr>
-      </p:pic>
-      <p:sp>
-        <p:nvSpPr>
-          <p:cNvPr id="17" name="Text 12"/>
-          <p:cNvSpPr/>
-          <p:nvPr/>
-        </p:nvSpPr>
-        <p:spPr>
-          <a:xfrm>
-            <a:off x="8683752" y="1755648"/>
-            <a:ext cx="2837688" cy="777240"/>
-          </a:xfrm>
-          <a:prstGeom prst="rect">
-            <a:avLst/>
-          </a:prstGeom>
-          <a:noFill/>
-          <a:ln/>
-        </p:spPr>
-        <p:txBody>
-          <a:bodyPr wrap="square" rtlCol="0" anchor="ctr"/>
-          <a:lstStyle/>
-          <a:p>
-            <a:pPr indent="0" marL="0">
+          <a:p>
+            <a:pPr marL="203200" indent="-203200">
               <a:lnSpc>
-                <a:spcPct val="100000"/>
+                <a:spcPct val="120000"/>
               </a:lnSpc>
-              <a:buNone/>
-            </a:pPr>
-            <a:r>
-              <a:rPr lang="en-US" sz="2000" b="1" dirty="0">
+              <a:spcAft>
+                <a:spcPts val="1000"/>
+              </a:spcAft>
+              <a:buSzPct val="100000"/>
+              <a:buChar char="•"/>
+            </a:pPr>
+            <a:r>
+              <a:rPr lang="en-US" sz="1800" dirty="0">
                 <a:solidFill>
                   <a:srgbClr val="002050"/>
-                </a:solidFill>
-                <a:latin typeface="Aptos Display" pitchFamily="34" charset="0"/>
-                <a:ea typeface="Aptos Display" pitchFamily="34" charset="-122"/>
-                <a:cs typeface="Aptos Display" pitchFamily="34" charset="-120"/>
-              </a:rPr>
-              <a:t>Track to done</a:t>
-            </a:r>
-            <a:endParaRPr lang="en-US" sz="2000" dirty="0"/>
-          </a:p>
-        </p:txBody>
-      </p:sp>
-      <p:sp>
-        <p:nvSpPr>
-          <p:cNvPr id="18" name="Text 13"/>
-          <p:cNvSpPr/>
-          <p:nvPr/>
-        </p:nvSpPr>
-        <p:spPr>
-          <a:xfrm>
-            <a:off x="8244840" y="2578608"/>
-            <a:ext cx="3276600" cy="1682496"/>
-          </a:xfrm>
-          <a:prstGeom prst="rect">
-            <a:avLst/>
-          </a:prstGeom>
-          <a:noFill/>
-          <a:ln/>
-        </p:spPr>
-        <p:txBody>
-          <a:bodyPr wrap="square" rtlCol="0" anchor="t"/>
-          <a:lstStyle/>
-          <a:p>
-            <a:pPr indent="0" marL="0">
-              <a:lnSpc>
-                <a:spcPct val="110000"/>
-              </a:lnSpc>
-              <a:buNone/>
-            </a:pPr>
-            <a:r>
-              <a:rPr lang="en-US" sz="1800" dirty="0">
-                <a:solidFill>
-                  <a:srgbClr val="6B7280"/>
                 </a:solidFill>
                 <a:latin typeface="Aptos" pitchFamily="34" charset="0"/>
                 <a:ea typeface="Aptos" pitchFamily="34" charset="-122"/>
                 <a:cs typeface="Aptos" pitchFamily="34" charset="-120"/>
               </a:rPr>
-              <a:t>Follow up on actions before the next meeting — decisions only count once they are implemented.</a:t>
+              <a:t>Follow up with people: thank them for their input and make sure they understand their assignments and have what they need.</a:t>
             </a:r>
             <a:endParaRPr lang="en-US" sz="1800" dirty="0"/>
           </a:p>
-        </p:txBody>
-      </p:sp>
-      <p:sp>
-        <p:nvSpPr>
-          <p:cNvPr id="19" name="Text 14"/>
-          <p:cNvSpPr/>
-          <p:nvPr/>
-        </p:nvSpPr>
-        <p:spPr>
-          <a:xfrm>
-            <a:off x="502920" y="4617720"/>
-            <a:ext cx="11183112" cy="548640"/>
-          </a:xfrm>
-          <a:prstGeom prst="rect">
-            <a:avLst/>
-          </a:prstGeom>
-          <a:noFill/>
-          <a:ln/>
-        </p:spPr>
-        <p:txBody>
-          <a:bodyPr wrap="square" rtlCol="0" anchor="ctr"/>
-          <a:lstStyle/>
-          <a:p>
-            <a:pPr indent="0" marL="0">
+          <a:p>
+            <a:pPr marL="203200" indent="-203200">
               <a:lnSpc>
-                <a:spcPct val="115000"/>
+                <a:spcPct val="120000"/>
               </a:lnSpc>
-              <a:buNone/>
-            </a:pPr>
-            <a:r>
-              <a:rPr lang="en-US" sz="1800" i="1" dirty="0">
-                <a:solidFill>
-                  <a:srgbClr val="6B7280"/>
+              <a:spcAft>
+                <a:spcPts val="1000"/>
+              </a:spcAft>
+              <a:buSzPct val="100000"/>
+              <a:buChar char="•"/>
+            </a:pPr>
+            <a:r>
+              <a:rPr lang="en-US" sz="1800" dirty="0">
+                <a:solidFill>
+                  <a:srgbClr val="002050"/>
                 </a:solidFill>
                 <a:latin typeface="Aptos" pitchFamily="34" charset="0"/>
                 <a:ea typeface="Aptos" pitchFamily="34" charset="-122"/>
                 <a:cs typeface="Aptos" pitchFamily="34" charset="-120"/>
               </a:rPr>
-              <a:t>Decisions that are not communicated and tracked might as well not have been taken.</a:t>
+              <a:t>Corrections or additions are recorded in the next meeting's minutes, and the group approves the minutes as accurate — as read or as amended.</a:t>
+            </a:r>
+            <a:endParaRPr lang="en-US" sz="1800" dirty="0"/>
+          </a:p>
+          <a:p>
+            <a:pPr marL="203200" indent="-203200">
+              <a:lnSpc>
+                <a:spcPct val="120000"/>
+              </a:lnSpc>
+              <a:spcAft>
+                <a:spcPts val="1000"/>
+              </a:spcAft>
+              <a:buSzPct val="100000"/>
+              <a:buChar char="•"/>
+            </a:pPr>
+            <a:r>
+              <a:rPr lang="en-US" sz="1800" dirty="0">
+                <a:solidFill>
+                  <a:srgbClr val="002050"/>
+                </a:solidFill>
+                <a:latin typeface="Aptos" pitchFamily="34" charset="0"/>
+                <a:ea typeface="Aptos" pitchFamily="34" charset="-122"/>
+                <a:cs typeface="Aptos" pitchFamily="34" charset="-120"/>
+              </a:rPr>
+              <a:t>Then start getting ready for the next meeting.</a:t>
             </a:r>
             <a:endParaRPr lang="en-US" sz="1800" dirty="0"/>
           </a:p>
@@ -4540,9 +6733,9 @@
 </p:sld>
 </file>
 
-<file path=ppt/slides/slide5.xml><?xml version="1.0" encoding="utf-8"?>
+<file path=ppt/slides/slide7.xml><?xml version="1.0" encoding="utf-8"?>
 <p:sld xmlns:a="http://schemas.openxmlformats.org/drawingml/2006/main" xmlns:r="http://schemas.openxmlformats.org/officeDocument/2006/relationships" xmlns:p="http://schemas.openxmlformats.org/presentationml/2006/main">
-  <p:cSld name="Slide 5">
+  <p:cSld name="Slide 7">
     <p:bg>
       <p:bgPr>
         <a:solidFill>
@@ -4636,7 +6829,7 @@
                 <a:ea typeface="Aptos" pitchFamily="34" charset="-122"/>
                 <a:cs typeface="Aptos" pitchFamily="34" charset="-120"/>
               </a:rPr>
-              <a:t>5</a:t>
+              <a:t>7</a:t>
             </a:r>
             <a:endParaRPr lang="en-US" sz="1800" dirty="0"/>
           </a:p>
@@ -4695,7 +6888,7 @@
                 <a:ea typeface="Aptos" pitchFamily="34" charset="-122"/>
                 <a:cs typeface="Aptos" pitchFamily="34" charset="-120"/>
               </a:rPr>
-              <a:t>NOW PROVE IT</a:t>
+              <a:t>POST-MEETING FOLLOW-UP</a:t>
             </a:r>
             <a:endParaRPr lang="en-US" sz="1800" dirty="0"/>
           </a:p>
@@ -4734,7 +6927,7 @@
                 <a:ea typeface="Aptos Display" pitchFamily="34" charset="-122"/>
                 <a:cs typeface="Aptos Display" pitchFamily="34" charset="-120"/>
               </a:rPr>
-              <a:t>Your work for Specific Outcome 4</a:t>
+              <a:t>The decision meeting life cycle</a:t>
             </a:r>
             <a:endParaRPr lang="en-US" sz="3000" dirty="0"/>
           </a:p>
@@ -4742,18 +6935,60 @@
       </p:sp>
       <p:sp>
         <p:nvSpPr>
-          <p:cNvPr id="7" name="Shape 5"/>
-          <p:cNvSpPr/>
-          <p:nvPr/>
-        </p:nvSpPr>
-        <p:spPr>
-          <a:xfrm>
-            <a:off x="502920" y="1828800"/>
-            <a:ext cx="3605784" cy="2651760"/>
+          <p:cNvPr id="7" name="Text 5"/>
+          <p:cNvSpPr/>
+          <p:nvPr/>
+        </p:nvSpPr>
+        <p:spPr>
+          <a:xfrm>
+            <a:off x="502920" y="1280160"/>
+            <a:ext cx="11183112" cy="502920"/>
+          </a:xfrm>
+          <a:prstGeom prst="rect">
+            <a:avLst/>
+          </a:prstGeom>
+          <a:noFill/>
+          <a:ln/>
+        </p:spPr>
+        <p:txBody>
+          <a:bodyPr wrap="square" rtlCol="0" anchor="t"/>
+          <a:lstStyle/>
+          <a:p>
+            <a:pPr indent="0" marL="0">
+              <a:lnSpc>
+                <a:spcPct val="115000"/>
+              </a:lnSpc>
+              <a:buNone/>
+            </a:pPr>
+            <a:r>
+              <a:rPr lang="en-US" sz="1800" dirty="0">
+                <a:solidFill>
+                  <a:srgbClr val="6B7280"/>
+                </a:solidFill>
+                <a:latin typeface="Aptos" pitchFamily="34" charset="0"/>
+                <a:ea typeface="Aptos" pitchFamily="34" charset="-122"/>
+                <a:cs typeface="Aptos" pitchFamily="34" charset="-120"/>
+              </a:rPr>
+              <a:t>Decision meetings are not isolated events — they are part of a continuous cycle, and each stage can be face-to-face or distributed, synchronous or asynchronous:</a:t>
+            </a:r>
+            <a:endParaRPr lang="en-US" sz="1800" dirty="0"/>
+          </a:p>
+        </p:txBody>
+      </p:sp>
+      <p:sp>
+        <p:nvSpPr>
+          <p:cNvPr id="8" name="Shape 6"/>
+          <p:cNvSpPr/>
+          <p:nvPr/>
+        </p:nvSpPr>
+        <p:spPr>
+          <a:xfrm>
+            <a:off x="502920" y="1965960"/>
+            <a:ext cx="3605784" cy="2377440"/>
           </a:xfrm>
           <a:prstGeom prst="roundRect">
             <a:avLst>
-              <a:gd name="adj" fmla="val 3103"/>
+              <a:gd name="adj" fmla="val 3462"/>
             </a:avLst>
           </a:prstGeom>
           <a:solidFill>
@@ -4776,7 +7011,7 @@
       </p:sp>
       <p:pic>
         <p:nvPicPr>
-          <p:cNvPr id="8" name="Image 0" descr="preencoded.png">    </p:cNvPr>
+          <p:cNvPr id="9" name="Image 0" descr="preencoded.png">    </p:cNvPr>
           <p:cNvPicPr>
             <a:picLocks noChangeAspect="1"/>
           </p:cNvPicPr>
@@ -4796,7 +7031,7 @@
         </p:blipFill>
         <p:spPr>
           <a:xfrm>
-            <a:off x="667512" y="2011680"/>
+            <a:off x="667512" y="2148840"/>
             <a:ext cx="347472" cy="347472"/>
           </a:xfrm>
           <a:prstGeom prst="rect">
@@ -4806,13 +7041,13 @@
       </p:pic>
       <p:sp>
         <p:nvSpPr>
-          <p:cNvPr id="9" name="Text 6"/>
-          <p:cNvSpPr/>
-          <p:nvPr/>
-        </p:nvSpPr>
-        <p:spPr>
-          <a:xfrm>
-            <a:off x="1106424" y="1938528"/>
+          <p:cNvPr id="10" name="Text 7"/>
+          <p:cNvSpPr/>
+          <p:nvPr/>
+        </p:nvSpPr>
+        <p:spPr>
+          <a:xfrm>
+            <a:off x="1106424" y="2075688"/>
             <a:ext cx="2837688" cy="777240"/>
           </a:xfrm>
           <a:prstGeom prst="rect">
@@ -4840,7 +7075,7 @@
                 <a:ea typeface="Aptos Display" pitchFamily="34" charset="-122"/>
                 <a:cs typeface="Aptos Display" pitchFamily="34" charset="-120"/>
               </a:rPr>
-              <a:t>Questioning session</a:t>
+              <a:t>Pre-meeting</a:t>
             </a:r>
             <a:endParaRPr lang="en-US" sz="2000" dirty="0"/>
           </a:p>
@@ -4848,14 +7083,14 @@
       </p:sp>
       <p:sp>
         <p:nvSpPr>
-          <p:cNvPr id="10" name="Text 7"/>
-          <p:cNvSpPr/>
-          <p:nvPr/>
-        </p:nvSpPr>
-        <p:spPr>
-          <a:xfrm>
-            <a:off x="667512" y="2761488"/>
-            <a:ext cx="3276600" cy="1591056"/>
+          <p:cNvPr id="11" name="Text 8"/>
+          <p:cNvSpPr/>
+          <p:nvPr/>
+        </p:nvSpPr>
+        <p:spPr>
+          <a:xfrm>
+            <a:off x="667512" y="2898648"/>
+            <a:ext cx="3276600" cy="1316736"/>
           </a:xfrm>
           <a:prstGeom prst="rect">
             <a:avLst/>
@@ -4882,7 +7117,7 @@
                 <a:ea typeface="Aptos" pitchFamily="34" charset="-122"/>
                 <a:cs typeface="Aptos" pitchFamily="34" charset="-120"/>
               </a:rPr>
-              <a:t>“Post-meeting follow-up” — typed answers, AI-marked.</a:t>
+              <a:t>Create the agenda, identify the people to invite and their roles, prepare each participant, include background information.</a:t>
             </a:r>
             <a:endParaRPr lang="en-US" sz="1800" dirty="0"/>
           </a:p>
@@ -4890,18 +7125,18 @@
       </p:sp>
       <p:sp>
         <p:nvSpPr>
-          <p:cNvPr id="11" name="Shape 8"/>
-          <p:cNvSpPr/>
-          <p:nvPr/>
-        </p:nvSpPr>
-        <p:spPr>
-          <a:xfrm>
-            <a:off x="4291584" y="1828800"/>
-            <a:ext cx="3605784" cy="2651760"/>
+          <p:cNvPr id="12" name="Shape 9"/>
+          <p:cNvSpPr/>
+          <p:nvPr/>
+        </p:nvSpPr>
+        <p:spPr>
+          <a:xfrm>
+            <a:off x="4291584" y="1965960"/>
+            <a:ext cx="3605784" cy="2377440"/>
           </a:xfrm>
           <a:prstGeom prst="roundRect">
             <a:avLst>
-              <a:gd name="adj" fmla="val 3103"/>
+              <a:gd name="adj" fmla="val 3462"/>
             </a:avLst>
           </a:prstGeom>
           <a:solidFill>
@@ -4924,7 +7159,7 @@
       </p:sp>
       <p:pic>
         <p:nvPicPr>
-          <p:cNvPr id="12" name="Image 1" descr="preencoded.png">    </p:cNvPr>
+          <p:cNvPr id="13" name="Image 1" descr="preencoded.png">    </p:cNvPr>
           <p:cNvPicPr>
             <a:picLocks noChangeAspect="1"/>
           </p:cNvPicPr>
@@ -4944,7 +7179,7 @@
         </p:blipFill>
         <p:spPr>
           <a:xfrm>
-            <a:off x="4456176" y="2011680"/>
+            <a:off x="4456176" y="2148840"/>
             <a:ext cx="347472" cy="347472"/>
           </a:xfrm>
           <a:prstGeom prst="rect">
@@ -4954,13 +7189,13 @@
       </p:pic>
       <p:sp>
         <p:nvSpPr>
-          <p:cNvPr id="13" name="Text 9"/>
-          <p:cNvSpPr/>
-          <p:nvPr/>
-        </p:nvSpPr>
-        <p:spPr>
-          <a:xfrm>
-            <a:off x="4895088" y="1938528"/>
+          <p:cNvPr id="14" name="Text 10"/>
+          <p:cNvSpPr/>
+          <p:nvPr/>
+        </p:nvSpPr>
+        <p:spPr>
+          <a:xfrm>
+            <a:off x="4895088" y="2075688"/>
             <a:ext cx="2837688" cy="777240"/>
           </a:xfrm>
           <a:prstGeom prst="rect">
@@ -4988,7 +7223,7 @@
                 <a:ea typeface="Aptos Display" pitchFamily="34" charset="-122"/>
                 <a:cs typeface="Aptos Display" pitchFamily="34" charset="-120"/>
               </a:rPr>
-              <a:t>Quiz 4 &amp; self assessment</a:t>
+              <a:t>Meeting</a:t>
             </a:r>
             <a:endParaRPr lang="en-US" sz="2000" dirty="0"/>
           </a:p>
@@ -4996,14 +7231,14 @@
       </p:sp>
       <p:sp>
         <p:nvSpPr>
-          <p:cNvPr id="14" name="Text 10"/>
-          <p:cNvSpPr/>
-          <p:nvPr/>
-        </p:nvSpPr>
-        <p:spPr>
-          <a:xfrm>
-            <a:off x="4456176" y="2761488"/>
-            <a:ext cx="3276600" cy="1591056"/>
+          <p:cNvPr id="15" name="Text 11"/>
+          <p:cNvSpPr/>
+          <p:nvPr/>
+        </p:nvSpPr>
+        <p:spPr>
+          <a:xfrm>
+            <a:off x="4456176" y="2898648"/>
+            <a:ext cx="3276600" cy="1316736"/>
           </a:xfrm>
           <a:prstGeom prst="rect">
             <a:avLst/>
@@ -5030,7 +7265,7 @@
                 <a:ea typeface="Aptos" pitchFamily="34" charset="-122"/>
                 <a:cs typeface="Aptos" pitchFamily="34" charset="-120"/>
               </a:rPr>
-              <a:t>Post-meeting follow-up quiz, then the honest tick-box self assessment.</a:t>
+              <a:t>Interactions among participants conclude with one or more decisions to be implemented afterwards.</a:t>
             </a:r>
             <a:endParaRPr lang="en-US" sz="1800" dirty="0"/>
           </a:p>
@@ -5038,18 +7273,18 @@
       </p:sp>
       <p:sp>
         <p:nvSpPr>
-          <p:cNvPr id="15" name="Shape 11"/>
-          <p:cNvSpPr/>
-          <p:nvPr/>
-        </p:nvSpPr>
-        <p:spPr>
-          <a:xfrm>
-            <a:off x="8080248" y="1828800"/>
-            <a:ext cx="3605784" cy="2651760"/>
+          <p:cNvPr id="16" name="Shape 12"/>
+          <p:cNvSpPr/>
+          <p:nvPr/>
+        </p:nvSpPr>
+        <p:spPr>
+          <a:xfrm>
+            <a:off x="8080248" y="1965960"/>
+            <a:ext cx="3605784" cy="2377440"/>
           </a:xfrm>
           <a:prstGeom prst="roundRect">
             <a:avLst>
-              <a:gd name="adj" fmla="val 3103"/>
+              <a:gd name="adj" fmla="val 3462"/>
             </a:avLst>
           </a:prstGeom>
           <a:solidFill>
@@ -5072,7 +7307,7 @@
       </p:sp>
       <p:pic>
         <p:nvPicPr>
-          <p:cNvPr id="16" name="Image 2" descr="preencoded.png">    </p:cNvPr>
+          <p:cNvPr id="17" name="Image 2" descr="preencoded.png">    </p:cNvPr>
           <p:cNvPicPr>
             <a:picLocks noChangeAspect="1"/>
           </p:cNvPicPr>
@@ -5092,7 +7327,7 @@
         </p:blipFill>
         <p:spPr>
           <a:xfrm>
-            <a:off x="8244840" y="2011680"/>
+            <a:off x="8244840" y="2148840"/>
             <a:ext cx="347472" cy="347472"/>
           </a:xfrm>
           <a:prstGeom prst="rect">
@@ -5102,13 +7337,13 @@
       </p:pic>
       <p:sp>
         <p:nvSpPr>
-          <p:cNvPr id="17" name="Text 12"/>
-          <p:cNvSpPr/>
-          <p:nvPr/>
-        </p:nvSpPr>
-        <p:spPr>
-          <a:xfrm>
-            <a:off x="8683752" y="1938528"/>
+          <p:cNvPr id="18" name="Text 13"/>
+          <p:cNvSpPr/>
+          <p:nvPr/>
+        </p:nvSpPr>
+        <p:spPr>
+          <a:xfrm>
+            <a:off x="8683752" y="2075688"/>
             <a:ext cx="2837688" cy="777240"/>
           </a:xfrm>
           <a:prstGeom prst="rect">
@@ -5136,7 +7371,7 @@
                 <a:ea typeface="Aptos Display" pitchFamily="34" charset="-122"/>
                 <a:cs typeface="Aptos Display" pitchFamily="34" charset="-120"/>
               </a:rPr>
-              <a:t>Logbook — Meeting portfolio</a:t>
+              <a:t>Post-meeting</a:t>
             </a:r>
             <a:endParaRPr lang="en-US" sz="2000" dirty="0"/>
           </a:p>
@@ -5144,14 +7379,14 @@
       </p:sp>
       <p:sp>
         <p:nvSpPr>
-          <p:cNvPr id="18" name="Text 13"/>
-          <p:cNvSpPr/>
-          <p:nvPr/>
-        </p:nvSpPr>
-        <p:spPr>
-          <a:xfrm>
-            <a:off x="8244840" y="2761488"/>
-            <a:ext cx="3276600" cy="1591056"/>
+          <p:cNvPr id="19" name="Text 14"/>
+          <p:cNvSpPr/>
+          <p:nvPr/>
+        </p:nvSpPr>
+        <p:spPr>
+          <a:xfrm>
+            <a:off x="8244840" y="2898648"/>
+            <a:ext cx="3276600" cy="1316736"/>
           </a:xfrm>
           <a:prstGeom prst="rect">
             <a:avLst/>
@@ -5178,7 +7413,49 @@
                 <a:ea typeface="Aptos" pitchFamily="34" charset="-122"/>
                 <a:cs typeface="Aptos" pitchFamily="34" charset="-120"/>
               </a:rPr>
-              <a:t>Notice and agenda, invitations, attendance register, minutes and action summary. Mark it 114051.</a:t>
+              <a:t>Dissemination, monitoring the implementation of decisions, and clarifying ambiguous decision details — often by people who weren't in the room.</a:t>
+            </a:r>
+            <a:endParaRPr lang="en-US" sz="1800" dirty="0"/>
+          </a:p>
+        </p:txBody>
+      </p:sp>
+      <p:sp>
+        <p:nvSpPr>
+          <p:cNvPr id="20" name="Text 15"/>
+          <p:cNvSpPr/>
+          <p:nvPr/>
+        </p:nvSpPr>
+        <p:spPr>
+          <a:xfrm>
+            <a:off x="502920" y="4572000"/>
+            <a:ext cx="11183112" cy="548640"/>
+          </a:xfrm>
+          <a:prstGeom prst="rect">
+            <a:avLst/>
+          </a:prstGeom>
+          <a:noFill/>
+          <a:ln/>
+        </p:spPr>
+        <p:txBody>
+          <a:bodyPr wrap="square" rtlCol="0" anchor="ctr"/>
+          <a:lstStyle/>
+          <a:p>
+            <a:pPr indent="0" marL="0">
+              <a:lnSpc>
+                <a:spcPct val="115000"/>
+              </a:lnSpc>
+              <a:buNone/>
+            </a:pPr>
+            <a:r>
+              <a:rPr lang="en-US" sz="1800" i="1" dirty="0">
+                <a:solidFill>
+                  <a:srgbClr val="6B7280"/>
+                </a:solidFill>
+                <a:latin typeface="Aptos" pitchFamily="34" charset="0"/>
+                <a:ea typeface="Aptos" pitchFamily="34" charset="-122"/>
+                <a:cs typeface="Aptos" pitchFamily="34" charset="-120"/>
+              </a:rPr>
+              <a:t>The gap between the end of a meeting and its implementation can turn a decision inconsequent — decisions implemented without follow-up produce outcomes different from those planned.</a:t>
             </a:r>
             <a:endParaRPr lang="en-US" sz="1800" dirty="0"/>
           </a:p>
@@ -5192,13 +7469,13 @@
 </p:sld>
 </file>
 
-<file path=ppt/slides/slide6.xml><?xml version="1.0" encoding="utf-8"?>
+<file path=ppt/slides/slide8.xml><?xml version="1.0" encoding="utf-8"?>
 <p:sld xmlns:a="http://schemas.openxmlformats.org/drawingml/2006/main" xmlns:r="http://schemas.openxmlformats.org/officeDocument/2006/relationships" xmlns:p="http://schemas.openxmlformats.org/presentationml/2006/main">
-  <p:cSld name="Slide 6">
+  <p:cSld name="Slide 8">
     <p:bg>
       <p:bgPr>
         <a:solidFill>
-          <a:srgbClr val="002050"/>
+          <a:srgbClr val="FFFFFF"/>
         </a:solidFill>
       </p:bgPr>
     </p:bg>
@@ -5288,7 +7565,7 @@
                 <a:ea typeface="Aptos" pitchFamily="34" charset="-122"/>
                 <a:cs typeface="Aptos" pitchFamily="34" charset="-120"/>
               </a:rPr>
-              <a:t>6</a:t>
+              <a:t>8</a:t>
             </a:r>
             <a:endParaRPr lang="en-US" sz="1800" dirty="0"/>
           </a:p>
@@ -5316,27 +7593,119 @@
       </p:sp>
       <p:sp>
         <p:nvSpPr>
-          <p:cNvPr id="5" name="Shape 3"/>
-          <p:cNvSpPr/>
-          <p:nvPr/>
-        </p:nvSpPr>
-        <p:spPr>
-          <a:xfrm>
-            <a:off x="0" y="0"/>
-            <a:ext cx="12188952" cy="109728"/>
-          </a:xfrm>
-          <a:prstGeom prst="rect">
-            <a:avLst/>
+          <p:cNvPr id="5" name="Text 3"/>
+          <p:cNvSpPr/>
+          <p:nvPr/>
+        </p:nvSpPr>
+        <p:spPr>
+          <a:xfrm>
+            <a:off x="502920" y="237744"/>
+            <a:ext cx="11183112" cy="347472"/>
+          </a:xfrm>
+          <a:prstGeom prst="rect">
+            <a:avLst/>
+          </a:prstGeom>
+          <a:noFill/>
+          <a:ln/>
+        </p:spPr>
+        <p:txBody>
+          <a:bodyPr wrap="square" rtlCol="0" anchor="ctr"/>
+          <a:lstStyle/>
+          <a:p>
+            <a:pPr indent="0" marL="0">
+              <a:buNone/>
+            </a:pPr>
+            <a:r>
+              <a:rPr lang="en-US" sz="1800" b="1" spc="200" kern="0" dirty="0">
+                <a:solidFill>
+                  <a:srgbClr val="0F6CBD"/>
+                </a:solidFill>
+                <a:latin typeface="Aptos" pitchFamily="34" charset="0"/>
+                <a:ea typeface="Aptos" pitchFamily="34" charset="-122"/>
+                <a:cs typeface="Aptos" pitchFamily="34" charset="-120"/>
+              </a:rPr>
+              <a:t>POST-MEETING FOLLOW-UP</a:t>
+            </a:r>
+            <a:endParaRPr lang="en-US" sz="1800" dirty="0"/>
+          </a:p>
+        </p:txBody>
+      </p:sp>
+      <p:sp>
+        <p:nvSpPr>
+          <p:cNvPr id="6" name="Text 4"/>
+          <p:cNvSpPr/>
+          <p:nvPr/>
+        </p:nvSpPr>
+        <p:spPr>
+          <a:xfrm>
+            <a:off x="502920" y="585216"/>
+            <a:ext cx="11183112" cy="603504"/>
+          </a:xfrm>
+          <a:prstGeom prst="rect">
+            <a:avLst/>
+          </a:prstGeom>
+          <a:noFill/>
+          <a:ln/>
+        </p:spPr>
+        <p:txBody>
+          <a:bodyPr wrap="square" rtlCol="0" anchor="ctr"/>
+          <a:lstStyle/>
+          <a:p>
+            <a:pPr indent="0" marL="0">
+              <a:buNone/>
+            </a:pPr>
+            <a:r>
+              <a:rPr lang="en-US" sz="3000" b="1" dirty="0">
+                <a:solidFill>
+                  <a:srgbClr val="002050"/>
+                </a:solidFill>
+                <a:latin typeface="Aptos Display" pitchFamily="34" charset="0"/>
+                <a:ea typeface="Aptos Display" pitchFamily="34" charset="-122"/>
+                <a:cs typeface="Aptos Display" pitchFamily="34" charset="-120"/>
+              </a:rPr>
+              <a:t>Four aspects of post-meeting support</a:t>
+            </a:r>
+            <a:endParaRPr lang="en-US" sz="3000" dirty="0"/>
+          </a:p>
+        </p:txBody>
+      </p:sp>
+      <p:sp>
+        <p:nvSpPr>
+          <p:cNvPr id="7" name="Shape 5"/>
+          <p:cNvSpPr/>
+          <p:nvPr/>
+        </p:nvSpPr>
+        <p:spPr>
+          <a:xfrm>
+            <a:off x="502920" y="1600200"/>
+            <a:ext cx="5500116" cy="2011680"/>
+          </a:xfrm>
+          <a:prstGeom prst="roundRect">
+            <a:avLst>
+              <a:gd name="adj" fmla="val 4091"/>
+            </a:avLst>
           </a:prstGeom>
           <a:solidFill>
-            <a:srgbClr val="0F6CBD"/>
+            <a:srgbClr val="FFFFFF"/>
           </a:solidFill>
-          <a:ln/>
+          <a:ln w="12700">
+            <a:solidFill>
+              <a:srgbClr val="D5E3F2"/>
+            </a:solidFill>
+            <a:prstDash val="solid"/>
+          </a:ln>
+          <a:effectLst>
+            <a:outerShdw sx="100000" sy="100000" kx="0" ky="0" algn="bl" rotWithShape="0" blurRad="88900" dist="25400" dir="5400000">
+              <a:srgbClr val="9AB4CC">
+                <a:alpha val="30000"/>
+              </a:srgbClr>
+            </a:outerShdw>
+          </a:effectLst>
         </p:spPr>
       </p:sp>
       <p:pic>
         <p:nvPicPr>
-          <p:cNvPr id="6" name="Image 0" descr="preencoded.png">    </p:cNvPr>
+          <p:cNvPr id="8" name="Image 0" descr="preencoded.png">    </p:cNvPr>
           <p:cNvPicPr>
             <a:picLocks noChangeAspect="1"/>
           </p:cNvPicPr>
@@ -5356,8 +7725,8 @@
         </p:blipFill>
         <p:spPr>
           <a:xfrm>
-            <a:off x="502920" y="1463040"/>
-            <a:ext cx="640080" cy="640080"/>
+            <a:off x="667512" y="1783080"/>
+            <a:ext cx="347472" cy="347472"/>
           </a:xfrm>
           <a:prstGeom prst="rect">
             <a:avLst/>
@@ -5366,14 +7735,14 @@
       </p:pic>
       <p:sp>
         <p:nvSpPr>
-          <p:cNvPr id="7" name="Text 4"/>
-          <p:cNvSpPr/>
-          <p:nvPr/>
-        </p:nvSpPr>
-        <p:spPr>
-          <a:xfrm>
-            <a:off x="502920" y="2240280"/>
-            <a:ext cx="11183112" cy="1280160"/>
+          <p:cNvPr id="9" name="Text 6"/>
+          <p:cNvSpPr/>
+          <p:nvPr/>
+        </p:nvSpPr>
+        <p:spPr>
+          <a:xfrm>
+            <a:off x="1106424" y="1709928"/>
+            <a:ext cx="4732020" cy="777240"/>
           </a:xfrm>
           <a:prstGeom prst="rect">
             <a:avLst/>
@@ -5386,60 +7755,63 @@
           <a:lstStyle/>
           <a:p>
             <a:pPr indent="0" marL="0">
+              <a:lnSpc>
+                <a:spcPct val="100000"/>
+              </a:lnSpc>
               <a:buNone/>
             </a:pPr>
             <a:r>
-              <a:rPr lang="en-US" sz="3600" b="1" dirty="0">
-                <a:solidFill>
-                  <a:srgbClr val="FFFFFF"/>
+              <a:rPr lang="en-US" sz="2000" b="1" dirty="0">
+                <a:solidFill>
+                  <a:srgbClr val="002050"/>
                 </a:solidFill>
                 <a:latin typeface="Aptos Display" pitchFamily="34" charset="0"/>
                 <a:ea typeface="Aptos Display" pitchFamily="34" charset="-122"/>
                 <a:cs typeface="Aptos Display" pitchFamily="34" charset="-120"/>
               </a:rPr>
-              <a:t>The meeting is not over when it ends.</a:t>
-            </a:r>
-            <a:endParaRPr lang="en-US" sz="3600" dirty="0"/>
-          </a:p>
-        </p:txBody>
-      </p:sp>
-      <p:sp>
-        <p:nvSpPr>
-          <p:cNvPr id="8" name="Text 5"/>
-          <p:cNvSpPr/>
-          <p:nvPr/>
-        </p:nvSpPr>
-        <p:spPr>
-          <a:xfrm>
-            <a:off x="502920" y="3611880"/>
-            <a:ext cx="10058400" cy="1280160"/>
-          </a:xfrm>
-          <a:prstGeom prst="rect">
-            <a:avLst/>
-          </a:prstGeom>
-          <a:noFill/>
-          <a:ln/>
-        </p:spPr>
-        <p:txBody>
-          <a:bodyPr wrap="square" rtlCol="0" anchor="ctr"/>
+              <a:t>1 · Implementation plan</a:t>
+            </a:r>
+            <a:endParaRPr lang="en-US" sz="2000" dirty="0"/>
+          </a:p>
+        </p:txBody>
+      </p:sp>
+      <p:sp>
+        <p:nvSpPr>
+          <p:cNvPr id="10" name="Text 7"/>
+          <p:cNvSpPr/>
+          <p:nvPr/>
+        </p:nvSpPr>
+        <p:spPr>
+          <a:xfrm>
+            <a:off x="667512" y="2532888"/>
+            <a:ext cx="5170932" cy="950976"/>
+          </a:xfrm>
+          <a:prstGeom prst="rect">
+            <a:avLst/>
+          </a:prstGeom>
+          <a:noFill/>
+          <a:ln/>
+        </p:spPr>
+        <p:txBody>
+          <a:bodyPr wrap="square" rtlCol="0" anchor="t"/>
           <a:lstStyle/>
           <a:p>
             <a:pPr indent="0" marL="0">
               <a:lnSpc>
-                <a:spcPct val="125000"/>
+                <a:spcPct val="110000"/>
               </a:lnSpc>
               <a:buNone/>
             </a:pPr>
             <a:r>
               <a:rPr lang="en-US" sz="1800" dirty="0">
                 <a:solidFill>
-                  <a:srgbClr val="B9D6F2"/>
+                  <a:srgbClr val="6B7280"/>
                 </a:solidFill>
                 <a:latin typeface="Aptos" pitchFamily="34" charset="0"/>
                 <a:ea typeface="Aptos" pitchFamily="34" charset="-122"/>
                 <a:cs typeface="Aptos" pitchFamily="34" charset="-120"/>
               </a:rPr>
-              <a:t>Accurate minutes per organisational policy » decisions communicated in format and on time » actions summarised, owned and tracked — follow-up is what turns discussion into delivery.</a:t>
+              <a:t>Draft and publish an execution plan for each decision; allow changes during execution; generate tasks for the implementation team and record completed tasks.</a:t>
             </a:r>
             <a:endParaRPr lang="en-US" sz="1800" dirty="0"/>
           </a:p>
@@ -5447,14 +7819,78 @@
       </p:sp>
       <p:sp>
         <p:nvSpPr>
-          <p:cNvPr id="9" name="Text 6"/>
-          <p:cNvSpPr/>
-          <p:nvPr/>
-        </p:nvSpPr>
-        <p:spPr>
-          <a:xfrm>
-            <a:off x="502920" y="6291072"/>
-            <a:ext cx="11183112" cy="365760"/>
+          <p:cNvPr id="11" name="Shape 8"/>
+          <p:cNvSpPr/>
+          <p:nvPr/>
+        </p:nvSpPr>
+        <p:spPr>
+          <a:xfrm>
+            <a:off x="6185916" y="1600200"/>
+            <a:ext cx="5500116" cy="2011680"/>
+          </a:xfrm>
+          <a:prstGeom prst="roundRect">
+            <a:avLst>
+              <a:gd name="adj" fmla="val 4091"/>
+            </a:avLst>
+          </a:prstGeom>
+          <a:solidFill>
+            <a:srgbClr val="FFFFFF"/>
+          </a:solidFill>
+          <a:ln w="12700">
+            <a:solidFill>
+              <a:srgbClr val="D5E3F2"/>
+            </a:solidFill>
+            <a:prstDash val="solid"/>
+          </a:ln>
+          <a:effectLst>
+            <a:outerShdw sx="100000" sy="100000" kx="0" ky="0" algn="bl" rotWithShape="0" blurRad="88900" dist="25400" dir="5400000">
+              <a:srgbClr val="9AB4CC">
+                <a:alpha val="30000"/>
+              </a:srgbClr>
+            </a:outerShdw>
+          </a:effectLst>
+        </p:spPr>
+      </p:sp>
+      <p:pic>
+        <p:nvPicPr>
+          <p:cNvPr id="12" name="Image 1" descr="preencoded.png">    </p:cNvPr>
+          <p:cNvPicPr>
+            <a:picLocks noChangeAspect="1"/>
+          </p:cNvPicPr>
+          <p:nvPr/>
+        </p:nvPicPr>
+        <p:blipFill>
+          <a:blip r:embed="rId3">
+            <a:extLst>
+              <a:ext uri="{96DAC541-7B7A-43D3-8B79-37D633B846F1}">
+                <asvg:svgBlip xmlns:asvg="http://schemas.microsoft.com/office/drawing/2016/SVG/main" r:embed="rId4"/>
+              </a:ext>
+            </a:extLst>
+          </a:blip>
+          <a:stretch>
+            <a:fillRect/>
+          </a:stretch>
+        </p:blipFill>
+        <p:spPr>
+          <a:xfrm>
+            <a:off x="6350508" y="1783080"/>
+            <a:ext cx="347472" cy="347472"/>
+          </a:xfrm>
+          <a:prstGeom prst="rect">
+            <a:avLst/>
+          </a:prstGeom>
+        </p:spPr>
+      </p:pic>
+      <p:sp>
+        <p:nvSpPr>
+          <p:cNvPr id="13" name="Text 9"/>
+          <p:cNvSpPr/>
+          <p:nvPr/>
+        </p:nvSpPr>
+        <p:spPr>
+          <a:xfrm>
+            <a:off x="6789420" y="1709928"/>
+            <a:ext cx="4732020" cy="777240"/>
           </a:xfrm>
           <a:prstGeom prst="rect">
             <a:avLst/>
@@ -5467,18 +7903,709 @@
           <a:lstStyle/>
           <a:p>
             <a:pPr indent="0" marL="0">
+              <a:lnSpc>
+                <a:spcPct val="100000"/>
+              </a:lnSpc>
               <a:buNone/>
             </a:pPr>
             <a:r>
+              <a:rPr lang="en-US" sz="2000" b="1" dirty="0">
+                <a:solidFill>
+                  <a:srgbClr val="002050"/>
+                </a:solidFill>
+                <a:latin typeface="Aptos Display" pitchFamily="34" charset="0"/>
+                <a:ea typeface="Aptos Display" pitchFamily="34" charset="-122"/>
+                <a:cs typeface="Aptos Display" pitchFamily="34" charset="-120"/>
+              </a:rPr>
+              <a:t>2 · Follow-up of activities</a:t>
+            </a:r>
+            <a:endParaRPr lang="en-US" sz="2000" dirty="0"/>
+          </a:p>
+        </p:txBody>
+      </p:sp>
+      <p:sp>
+        <p:nvSpPr>
+          <p:cNvPr id="14" name="Text 10"/>
+          <p:cNvSpPr/>
+          <p:nvPr/>
+        </p:nvSpPr>
+        <p:spPr>
+          <a:xfrm>
+            <a:off x="6350508" y="2532888"/>
+            <a:ext cx="5170932" cy="950976"/>
+          </a:xfrm>
+          <a:prstGeom prst="rect">
+            <a:avLst/>
+          </a:prstGeom>
+          <a:noFill/>
+          <a:ln/>
+        </p:spPr>
+        <p:txBody>
+          <a:bodyPr wrap="square" rtlCol="0" anchor="t"/>
+          <a:lstStyle/>
+          <a:p>
+            <a:pPr indent="0" marL="0">
+              <a:lnSpc>
+                <a:spcPct val="110000"/>
+              </a:lnSpc>
+              <a:buNone/>
+            </a:pPr>
+            <a:r>
               <a:rPr lang="en-US" sz="1800" dirty="0">
                 <a:solidFill>
-                  <a:srgbClr val="6E93BC"/>
+                  <a:srgbClr val="6B7280"/>
                 </a:solidFill>
                 <a:latin typeface="Aptos" pitchFamily="34" charset="0"/>
                 <a:ea typeface="Aptos" pitchFamily="34" charset="-122"/>
                 <a:cs typeface="Aptos" pitchFamily="34" charset="-120"/>
               </a:rPr>
-              <a:t>US 114051 · National Certificate: IT — System Support · SAQA ID 48573 · ITSS Learn</a:t>
+              <a:t>A formal link between each meeting outcome and its implementation — working steps whose execution can be tracked and corrected.</a:t>
+            </a:r>
+            <a:endParaRPr lang="en-US" sz="1800" dirty="0"/>
+          </a:p>
+        </p:txBody>
+      </p:sp>
+      <p:sp>
+        <p:nvSpPr>
+          <p:cNvPr id="15" name="Shape 11"/>
+          <p:cNvSpPr/>
+          <p:nvPr/>
+        </p:nvSpPr>
+        <p:spPr>
+          <a:xfrm>
+            <a:off x="502920" y="3794760"/>
+            <a:ext cx="5500116" cy="2011680"/>
+          </a:xfrm>
+          <a:prstGeom prst="roundRect">
+            <a:avLst>
+              <a:gd name="adj" fmla="val 4091"/>
+            </a:avLst>
+          </a:prstGeom>
+          <a:solidFill>
+            <a:srgbClr val="FFFFFF"/>
+          </a:solidFill>
+          <a:ln w="12700">
+            <a:solidFill>
+              <a:srgbClr val="D5E3F2"/>
+            </a:solidFill>
+            <a:prstDash val="solid"/>
+          </a:ln>
+          <a:effectLst>
+            <a:outerShdw sx="100000" sy="100000" kx="0" ky="0" algn="bl" rotWithShape="0" blurRad="88900" dist="25400" dir="5400000">
+              <a:srgbClr val="9AB4CC">
+                <a:alpha val="30000"/>
+              </a:srgbClr>
+            </a:outerShdw>
+          </a:effectLst>
+        </p:spPr>
+      </p:sp>
+      <p:pic>
+        <p:nvPicPr>
+          <p:cNvPr id="16" name="Image 2" descr="preencoded.png">    </p:cNvPr>
+          <p:cNvPicPr>
+            <a:picLocks noChangeAspect="1"/>
+          </p:cNvPicPr>
+          <p:nvPr/>
+        </p:nvPicPr>
+        <p:blipFill>
+          <a:blip r:embed="rId5">
+            <a:extLst>
+              <a:ext uri="{96DAC541-7B7A-43D3-8B79-37D633B846F1}">
+                <asvg:svgBlip xmlns:asvg="http://schemas.microsoft.com/office/drawing/2016/SVG/main" r:embed="rId6"/>
+              </a:ext>
+            </a:extLst>
+          </a:blip>
+          <a:stretch>
+            <a:fillRect/>
+          </a:stretch>
+        </p:blipFill>
+        <p:spPr>
+          <a:xfrm>
+            <a:off x="667512" y="3977640"/>
+            <a:ext cx="347472" cy="347472"/>
+          </a:xfrm>
+          <a:prstGeom prst="rect">
+            <a:avLst/>
+          </a:prstGeom>
+        </p:spPr>
+      </p:pic>
+      <p:sp>
+        <p:nvSpPr>
+          <p:cNvPr id="17" name="Text 12"/>
+          <p:cNvSpPr/>
+          <p:nvPr/>
+        </p:nvSpPr>
+        <p:spPr>
+          <a:xfrm>
+            <a:off x="1106424" y="3904488"/>
+            <a:ext cx="4732020" cy="777240"/>
+          </a:xfrm>
+          <a:prstGeom prst="rect">
+            <a:avLst/>
+          </a:prstGeom>
+          <a:noFill/>
+          <a:ln/>
+        </p:spPr>
+        <p:txBody>
+          <a:bodyPr wrap="square" rtlCol="0" anchor="ctr"/>
+          <a:lstStyle/>
+          <a:p>
+            <a:pPr indent="0" marL="0">
+              <a:lnSpc>
+                <a:spcPct val="100000"/>
+              </a:lnSpc>
+              <a:buNone/>
+            </a:pPr>
+            <a:r>
+              <a:rPr lang="en-US" sz="2000" b="1" dirty="0">
+                <a:solidFill>
+                  <a:srgbClr val="002050"/>
+                </a:solidFill>
+                <a:latin typeface="Aptos Display" pitchFamily="34" charset="0"/>
+                <a:ea typeface="Aptos Display" pitchFamily="34" charset="-122"/>
+                <a:cs typeface="Aptos Display" pitchFamily="34" charset="-120"/>
+              </a:rPr>
+              <a:t>3 · Means of interaction</a:t>
+            </a:r>
+            <a:endParaRPr lang="en-US" sz="2000" dirty="0"/>
+          </a:p>
+        </p:txBody>
+      </p:sp>
+      <p:sp>
+        <p:nvSpPr>
+          <p:cNvPr id="18" name="Text 13"/>
+          <p:cNvSpPr/>
+          <p:nvPr/>
+        </p:nvSpPr>
+        <p:spPr>
+          <a:xfrm>
+            <a:off x="667512" y="4727448"/>
+            <a:ext cx="5170932" cy="950976"/>
+          </a:xfrm>
+          <a:prstGeom prst="rect">
+            <a:avLst/>
+          </a:prstGeom>
+          <a:noFill/>
+          <a:ln/>
+        </p:spPr>
+        <p:txBody>
+          <a:bodyPr wrap="square" rtlCol="0" anchor="t"/>
+          <a:lstStyle/>
+          <a:p>
+            <a:pPr indent="0" marL="0">
+              <a:lnSpc>
+                <a:spcPct val="110000"/>
+              </a:lnSpc>
+              <a:buNone/>
+            </a:pPr>
+            <a:r>
+              <a:rPr lang="en-US" sz="1800" dirty="0">
+                <a:solidFill>
+                  <a:srgbClr val="6B7280"/>
+                </a:solidFill>
+                <a:latin typeface="Aptos" pitchFamily="34" charset="0"/>
+                <a:ea typeface="Aptos" pitchFamily="34" charset="-122"/>
+                <a:cs typeface="Aptos" pitchFamily="34" charset="-120"/>
+              </a:rPr>
+              <a:t>A structured, persistent communication channel between decision makers and implementers — an extension of the meeting for resolving ambiguities.</a:t>
+            </a:r>
+            <a:endParaRPr lang="en-US" sz="1800" dirty="0"/>
+          </a:p>
+        </p:txBody>
+      </p:sp>
+      <p:sp>
+        <p:nvSpPr>
+          <p:cNvPr id="19" name="Shape 14"/>
+          <p:cNvSpPr/>
+          <p:nvPr/>
+        </p:nvSpPr>
+        <p:spPr>
+          <a:xfrm>
+            <a:off x="6185916" y="3794760"/>
+            <a:ext cx="5500116" cy="2011680"/>
+          </a:xfrm>
+          <a:prstGeom prst="roundRect">
+            <a:avLst>
+              <a:gd name="adj" fmla="val 4091"/>
+            </a:avLst>
+          </a:prstGeom>
+          <a:solidFill>
+            <a:srgbClr val="FFFFFF"/>
+          </a:solidFill>
+          <a:ln w="12700">
+            <a:solidFill>
+              <a:srgbClr val="D5E3F2"/>
+            </a:solidFill>
+            <a:prstDash val="solid"/>
+          </a:ln>
+          <a:effectLst>
+            <a:outerShdw sx="100000" sy="100000" kx="0" ky="0" algn="bl" rotWithShape="0" blurRad="88900" dist="25400" dir="5400000">
+              <a:srgbClr val="9AB4CC">
+                <a:alpha val="30000"/>
+              </a:srgbClr>
+            </a:outerShdw>
+          </a:effectLst>
+        </p:spPr>
+      </p:sp>
+      <p:pic>
+        <p:nvPicPr>
+          <p:cNvPr id="20" name="Image 3" descr="preencoded.png">    </p:cNvPr>
+          <p:cNvPicPr>
+            <a:picLocks noChangeAspect="1"/>
+          </p:cNvPicPr>
+          <p:nvPr/>
+        </p:nvPicPr>
+        <p:blipFill>
+          <a:blip r:embed="rId7">
+            <a:extLst>
+              <a:ext uri="{96DAC541-7B7A-43D3-8B79-37D633B846F1}">
+                <asvg:svgBlip xmlns:asvg="http://schemas.microsoft.com/office/drawing/2016/SVG/main" r:embed="rId8"/>
+              </a:ext>
+            </a:extLst>
+          </a:blip>
+          <a:stretch>
+            <a:fillRect/>
+          </a:stretch>
+        </p:blipFill>
+        <p:spPr>
+          <a:xfrm>
+            <a:off x="6350508" y="3977640"/>
+            <a:ext cx="347472" cy="347472"/>
+          </a:xfrm>
+          <a:prstGeom prst="rect">
+            <a:avLst/>
+          </a:prstGeom>
+        </p:spPr>
+      </p:pic>
+      <p:sp>
+        <p:nvSpPr>
+          <p:cNvPr id="21" name="Text 15"/>
+          <p:cNvSpPr/>
+          <p:nvPr/>
+        </p:nvSpPr>
+        <p:spPr>
+          <a:xfrm>
+            <a:off x="6789420" y="3904488"/>
+            <a:ext cx="4732020" cy="777240"/>
+          </a:xfrm>
+          <a:prstGeom prst="rect">
+            <a:avLst/>
+          </a:prstGeom>
+          <a:noFill/>
+          <a:ln/>
+        </p:spPr>
+        <p:txBody>
+          <a:bodyPr wrap="square" rtlCol="0" anchor="ctr"/>
+          <a:lstStyle/>
+          <a:p>
+            <a:pPr indent="0" marL="0">
+              <a:lnSpc>
+                <a:spcPct val="100000"/>
+              </a:lnSpc>
+              <a:buNone/>
+            </a:pPr>
+            <a:r>
+              <a:rPr lang="en-US" sz="2000" b="1" dirty="0">
+                <a:solidFill>
+                  <a:srgbClr val="002050"/>
+                </a:solidFill>
+                <a:latin typeface="Aptos Display" pitchFamily="34" charset="0"/>
+                <a:ea typeface="Aptos Display" pitchFamily="34" charset="-122"/>
+                <a:cs typeface="Aptos Display" pitchFamily="34" charset="-120"/>
+              </a:rPr>
+              <a:t>4 · Awareness</a:t>
+            </a:r>
+            <a:endParaRPr lang="en-US" sz="2000" dirty="0"/>
+          </a:p>
+        </p:txBody>
+      </p:sp>
+      <p:sp>
+        <p:nvSpPr>
+          <p:cNvPr id="22" name="Text 16"/>
+          <p:cNvSpPr/>
+          <p:nvPr/>
+        </p:nvSpPr>
+        <p:spPr>
+          <a:xfrm>
+            <a:off x="6350508" y="4727448"/>
+            <a:ext cx="5170932" cy="950976"/>
+          </a:xfrm>
+          <a:prstGeom prst="rect">
+            <a:avLst/>
+          </a:prstGeom>
+          <a:noFill/>
+          <a:ln/>
+        </p:spPr>
+        <p:txBody>
+          <a:bodyPr wrap="square" rtlCol="0" anchor="t"/>
+          <a:lstStyle/>
+          <a:p>
+            <a:pPr indent="0" marL="0">
+              <a:lnSpc>
+                <a:spcPct val="110000"/>
+              </a:lnSpc>
+              <a:buNone/>
+            </a:pPr>
+            <a:r>
+              <a:rPr lang="en-US" sz="1800" dirty="0">
+                <a:solidFill>
+                  <a:srgbClr val="6B7280"/>
+                </a:solidFill>
+                <a:latin typeface="Aptos" pitchFamily="34" charset="0"/>
+                <a:ea typeface="Aptos" pitchFamily="34" charset="-122"/>
+                <a:cs typeface="Aptos" pitchFamily="34" charset="-120"/>
+              </a:rPr>
+              <a:t>Filtered progress information for people affected by the decision — subscriptions and notifications avoid the informal demands that waste time.</a:t>
+            </a:r>
+            <a:endParaRPr lang="en-US" sz="1800" dirty="0"/>
+          </a:p>
+        </p:txBody>
+      </p:sp>
+    </p:spTree>
+  </p:cSld>
+  <p:clrMapOvr>
+    <a:masterClrMapping/>
+  </p:clrMapOvr>
+</p:sld>
+</file>
+
+<file path=ppt/slides/slide9.xml><?xml version="1.0" encoding="utf-8"?>
+<p:sld xmlns:a="http://schemas.openxmlformats.org/drawingml/2006/main" xmlns:r="http://schemas.openxmlformats.org/officeDocument/2006/relationships" xmlns:p="http://schemas.openxmlformats.org/presentationml/2006/main">
+  <p:cSld name="Slide 9">
+    <p:bg>
+      <p:bgPr>
+        <a:solidFill>
+          <a:srgbClr val="FFFFFF"/>
+        </a:solidFill>
+      </p:bgPr>
+    </p:bg>
+    <p:spTree>
+      <p:nvGrpSpPr>
+        <p:cNvPr id="1" name=""/>
+        <p:cNvGrpSpPr/>
+        <p:nvPr/>
+      </p:nvGrpSpPr>
+      <p:grpSpPr>
+        <a:xfrm>
+          <a:off x="0" y="0"/>
+          <a:ext cx="0" cy="0"/>
+          <a:chOff x="0" y="0"/>
+          <a:chExt cx="0" cy="0"/>
+        </a:xfrm>
+      </p:grpSpPr>
+      <p:sp>
+        <p:nvSpPr>
+          <p:cNvPr id="2" name="Text 0"/>
+          <p:cNvSpPr/>
+          <p:nvPr/>
+        </p:nvSpPr>
+        <p:spPr>
+          <a:xfrm>
+            <a:off x="502920" y="6400800"/>
+            <a:ext cx="10268712" cy="347472"/>
+          </a:xfrm>
+          <a:prstGeom prst="rect">
+            <a:avLst/>
+          </a:prstGeom>
+          <a:noFill/>
+          <a:ln/>
+        </p:spPr>
+        <p:txBody>
+          <a:bodyPr wrap="square" rtlCol="0" anchor="ctr"/>
+          <a:lstStyle/>
+          <a:p>
+            <a:pPr indent="0" marL="0">
+              <a:buNone/>
+            </a:pPr>
+            <a:r>
+              <a:rPr lang="en-US" sz="1800" dirty="0">
+                <a:solidFill>
+                  <a:srgbClr val="6B7280"/>
+                </a:solidFill>
+                <a:latin typeface="Aptos" pitchFamily="34" charset="0"/>
+                <a:ea typeface="Aptos" pitchFamily="34" charset="-122"/>
+                <a:cs typeface="Aptos" pitchFamily="34" charset="-120"/>
+              </a:rPr>
+              <a:t>US 114051 · Conduct a technical practitioners meeting · NQF 5 · 4 credits</a:t>
+            </a:r>
+            <a:endParaRPr lang="en-US" sz="1800" dirty="0"/>
+          </a:p>
+        </p:txBody>
+      </p:sp>
+      <p:sp>
+        <p:nvSpPr>
+          <p:cNvPr id="3" name="Text 1"/>
+          <p:cNvSpPr/>
+          <p:nvPr/>
+        </p:nvSpPr>
+        <p:spPr>
+          <a:xfrm>
+            <a:off x="11045952" y="6400800"/>
+            <a:ext cx="640080" cy="347472"/>
+          </a:xfrm>
+          <a:prstGeom prst="rect">
+            <a:avLst/>
+          </a:prstGeom>
+          <a:noFill/>
+          <a:ln/>
+        </p:spPr>
+        <p:txBody>
+          <a:bodyPr wrap="square" rtlCol="0" anchor="ctr"/>
+          <a:lstStyle/>
+          <a:p>
+            <a:pPr algn="r" indent="0" marL="0">
+              <a:buNone/>
+            </a:pPr>
+            <a:r>
+              <a:rPr lang="en-US" sz="1800" dirty="0">
+                <a:solidFill>
+                  <a:srgbClr val="6B7280"/>
+                </a:solidFill>
+                <a:latin typeface="Aptos" pitchFamily="34" charset="0"/>
+                <a:ea typeface="Aptos" pitchFamily="34" charset="-122"/>
+                <a:cs typeface="Aptos" pitchFamily="34" charset="-120"/>
+              </a:rPr>
+              <a:t>9</a:t>
+            </a:r>
+            <a:endParaRPr lang="en-US" sz="1800" dirty="0"/>
+          </a:p>
+        </p:txBody>
+      </p:sp>
+      <p:sp>
+        <p:nvSpPr>
+          <p:cNvPr id="4" name="Shape 2"/>
+          <p:cNvSpPr/>
+          <p:nvPr/>
+        </p:nvSpPr>
+        <p:spPr>
+          <a:xfrm>
+            <a:off x="0" y="0"/>
+            <a:ext cx="12188952" cy="82296"/>
+          </a:xfrm>
+          <a:prstGeom prst="rect">
+            <a:avLst/>
+          </a:prstGeom>
+          <a:solidFill>
+            <a:srgbClr val="0F6CBD"/>
+          </a:solidFill>
+          <a:ln/>
+        </p:spPr>
+      </p:sp>
+      <p:sp>
+        <p:nvSpPr>
+          <p:cNvPr id="5" name="Text 3"/>
+          <p:cNvSpPr/>
+          <p:nvPr/>
+        </p:nvSpPr>
+        <p:spPr>
+          <a:xfrm>
+            <a:off x="502920" y="237744"/>
+            <a:ext cx="11183112" cy="347472"/>
+          </a:xfrm>
+          <a:prstGeom prst="rect">
+            <a:avLst/>
+          </a:prstGeom>
+          <a:noFill/>
+          <a:ln/>
+        </p:spPr>
+        <p:txBody>
+          <a:bodyPr wrap="square" rtlCol="0" anchor="ctr"/>
+          <a:lstStyle/>
+          <a:p>
+            <a:pPr indent="0" marL="0">
+              <a:buNone/>
+            </a:pPr>
+            <a:r>
+              <a:rPr lang="en-US" sz="1800" b="1" spc="200" kern="0" dirty="0">
+                <a:solidFill>
+                  <a:srgbClr val="0F6CBD"/>
+                </a:solidFill>
+                <a:latin typeface="Aptos" pitchFamily="34" charset="0"/>
+                <a:ea typeface="Aptos" pitchFamily="34" charset="-122"/>
+                <a:cs typeface="Aptos" pitchFamily="34" charset="-120"/>
+              </a:rPr>
+              <a:t>POST-MEETING FOLLOW-UP</a:t>
+            </a:r>
+            <a:endParaRPr lang="en-US" sz="1800" dirty="0"/>
+          </a:p>
+        </p:txBody>
+      </p:sp>
+      <p:sp>
+        <p:nvSpPr>
+          <p:cNvPr id="6" name="Text 4"/>
+          <p:cNvSpPr/>
+          <p:nvPr/>
+        </p:nvSpPr>
+        <p:spPr>
+          <a:xfrm>
+            <a:off x="502920" y="585216"/>
+            <a:ext cx="11183112" cy="603504"/>
+          </a:xfrm>
+          <a:prstGeom prst="rect">
+            <a:avLst/>
+          </a:prstGeom>
+          <a:noFill/>
+          <a:ln/>
+        </p:spPr>
+        <p:txBody>
+          <a:bodyPr wrap="square" rtlCol="0" anchor="ctr"/>
+          <a:lstStyle/>
+          <a:p>
+            <a:pPr indent="0" marL="0">
+              <a:buNone/>
+            </a:pPr>
+            <a:r>
+              <a:rPr lang="en-US" sz="3000" b="1" dirty="0">
+                <a:solidFill>
+                  <a:srgbClr val="002050"/>
+                </a:solidFill>
+                <a:latin typeface="Aptos Display" pitchFamily="34" charset="0"/>
+                <a:ea typeface="Aptos Display" pitchFamily="34" charset="-122"/>
+                <a:cs typeface="Aptos Display" pitchFamily="34" charset="-120"/>
+              </a:rPr>
+              <a:t>What structured follow-up buys you</a:t>
+            </a:r>
+            <a:endParaRPr lang="en-US" sz="3000" dirty="0"/>
+          </a:p>
+        </p:txBody>
+      </p:sp>
+      <p:sp>
+        <p:nvSpPr>
+          <p:cNvPr id="7" name="Text 5"/>
+          <p:cNvSpPr/>
+          <p:nvPr/>
+        </p:nvSpPr>
+        <p:spPr>
+          <a:xfrm>
+            <a:off x="502920" y="1645920"/>
+            <a:ext cx="11183112" cy="4572000"/>
+          </a:xfrm>
+          <a:prstGeom prst="rect">
+            <a:avLst/>
+          </a:prstGeom>
+          <a:noFill/>
+          <a:ln/>
+        </p:spPr>
+        <p:txBody>
+          <a:bodyPr wrap="square" rtlCol="0" anchor="t"/>
+          <a:lstStyle/>
+          <a:p>
+            <a:pPr marL="203200" indent="-203200">
+              <a:lnSpc>
+                <a:spcPct val="120000"/>
+              </a:lnSpc>
+              <a:spcAft>
+                <a:spcPts val="1000"/>
+              </a:spcAft>
+              <a:buSzPct val="100000"/>
+              <a:buChar char="•"/>
+            </a:pPr>
+            <a:r>
+              <a:rPr lang="en-US" sz="1800" dirty="0">
+                <a:solidFill>
+                  <a:srgbClr val="002050"/>
+                </a:solidFill>
+                <a:latin typeface="Aptos" pitchFamily="34" charset="0"/>
+                <a:ea typeface="Aptos" pitchFamily="34" charset="-122"/>
+                <a:cs typeface="Aptos" pitchFamily="34" charset="-120"/>
+              </a:rPr>
+              <a:t>A structured follow-up of the decisions made at the meeting — decisions stop getting lost on the way to implementation.</a:t>
+            </a:r>
+            <a:endParaRPr lang="en-US" sz="1800" dirty="0"/>
+          </a:p>
+          <a:p>
+            <a:pPr marL="203200" indent="-203200">
+              <a:lnSpc>
+                <a:spcPct val="120000"/>
+              </a:lnSpc>
+              <a:spcAft>
+                <a:spcPts val="1000"/>
+              </a:spcAft>
+              <a:buSzPct val="100000"/>
+              <a:buChar char="•"/>
+            </a:pPr>
+            <a:r>
+              <a:rPr lang="en-US" sz="1800" dirty="0">
+                <a:solidFill>
+                  <a:srgbClr val="002050"/>
+                </a:solidFill>
+                <a:latin typeface="Aptos" pitchFamily="34" charset="0"/>
+                <a:ea typeface="Aptos" pitchFamily="34" charset="-122"/>
+                <a:cs typeface="Aptos" pitchFamily="34" charset="-120"/>
+              </a:rPr>
+              <a:t>Explicit awareness of task progress for every involved role — including management and affected outsiders.</a:t>
+            </a:r>
+            <a:endParaRPr lang="en-US" sz="1800" dirty="0"/>
+          </a:p>
+          <a:p>
+            <a:pPr marL="203200" indent="-203200">
+              <a:lnSpc>
+                <a:spcPct val="120000"/>
+              </a:lnSpc>
+              <a:spcAft>
+                <a:spcPts val="1000"/>
+              </a:spcAft>
+              <a:buSzPct val="100000"/>
+              <a:buChar char="•"/>
+            </a:pPr>
+            <a:r>
+              <a:rPr lang="en-US" sz="1800" dirty="0">
+                <a:solidFill>
+                  <a:srgbClr val="002050"/>
+                </a:solidFill>
+                <a:latin typeface="Aptos" pitchFamily="34" charset="0"/>
+                <a:ea typeface="Aptos" pitchFamily="34" charset="-122"/>
+                <a:cs typeface="Aptos" pitchFamily="34" charset="-120"/>
+              </a:rPr>
+              <a:t>Organisational memory: potentially valuable information is captured and can be consulted at any time, helping avoid recurrent mistakes.</a:t>
+            </a:r>
+            <a:endParaRPr lang="en-US" sz="1800" dirty="0"/>
+          </a:p>
+          <a:p>
+            <a:pPr marL="203200" indent="-203200">
+              <a:lnSpc>
+                <a:spcPct val="120000"/>
+              </a:lnSpc>
+              <a:spcAft>
+                <a:spcPts val="1000"/>
+              </a:spcAft>
+              <a:buSzPct val="100000"/>
+              <a:buChar char="•"/>
+            </a:pPr>
+            <a:r>
+              <a:rPr lang="en-US" sz="1800" dirty="0">
+                <a:solidFill>
+                  <a:srgbClr val="002050"/>
+                </a:solidFill>
+                <a:latin typeface="Aptos" pitchFamily="34" charset="0"/>
+                <a:ea typeface="Aptos" pitchFamily="34" charset="-122"/>
+                <a:cs typeface="Aptos" pitchFamily="34" charset="-120"/>
+              </a:rPr>
+              <a:t>Easier identification of issues for the next cycle: unclear details of decisions just made and unsettled issues after tasks are done.</a:t>
+            </a:r>
+            <a:endParaRPr lang="en-US" sz="1800" dirty="0"/>
+          </a:p>
+          <a:p>
+            <a:pPr marL="203200" indent="-203200">
+              <a:lnSpc>
+                <a:spcPct val="120000"/>
+              </a:lnSpc>
+              <a:spcAft>
+                <a:spcPts val="1000"/>
+              </a:spcAft>
+              <a:buSzPct val="100000"/>
+              <a:buChar char="•"/>
+            </a:pPr>
+            <a:r>
+              <a:rPr lang="en-US" sz="1800" dirty="0">
+                <a:solidFill>
+                  <a:srgbClr val="002050"/>
+                </a:solidFill>
+                <a:latin typeface="Aptos" pitchFamily="34" charset="0"/>
+                <a:ea typeface="Aptos" pitchFamily="34" charset="-122"/>
+                <a:cs typeface="Aptos" pitchFamily="34" charset="-120"/>
+              </a:rPr>
+              <a:t>Formal definition of responsibilities and expected results — with less meeting time spent on follow-up chores.</a:t>
             </a:r>
             <a:endParaRPr lang="en-US" sz="1800" dirty="0"/>
           </a:p>
